--- a/lecture-slides_upload/lecture/08_Statistical Methods_Comparing Two Groups.pptx
+++ b/lecture-slides_upload/lecture/08_Statistical Methods_Comparing Two Groups.pptx
@@ -5,7 +5,7 @@
     <p:sldMasterId id="2147483648" r:id="rId1"/>
   </p:sldMasterIdLst>
   <p:notesMasterIdLst>
-    <p:notesMasterId r:id="rId15"/>
+    <p:notesMasterId r:id="rId17"/>
   </p:notesMasterIdLst>
   <p:sldIdLst>
     <p:sldId id="257" r:id="rId2"/>
@@ -15,12 +15,14 @@
     <p:sldId id="278" r:id="rId6"/>
     <p:sldId id="340" r:id="rId7"/>
     <p:sldId id="280" r:id="rId8"/>
-    <p:sldId id="341" r:id="rId9"/>
-    <p:sldId id="292" r:id="rId10"/>
-    <p:sldId id="261" r:id="rId11"/>
-    <p:sldId id="343" r:id="rId12"/>
-    <p:sldId id="344" r:id="rId13"/>
-    <p:sldId id="342" r:id="rId14"/>
+    <p:sldId id="356" r:id="rId9"/>
+    <p:sldId id="357" r:id="rId10"/>
+    <p:sldId id="358" r:id="rId11"/>
+    <p:sldId id="292" r:id="rId12"/>
+    <p:sldId id="261" r:id="rId13"/>
+    <p:sldId id="343" r:id="rId14"/>
+    <p:sldId id="344" r:id="rId15"/>
+    <p:sldId id="342" r:id="rId16"/>
   </p:sldIdLst>
   <p:sldSz cx="12192000" cy="6858000"/>
   <p:notesSz cx="6858000" cy="9144000"/>
@@ -221,7 +223,7 @@
           <a:p>
             <a:fld id="{6A4B1ABF-BAF2-0E4B-88A8-8F2BBF0074AC}" type="datetimeFigureOut">
               <a:rPr lang="en-US" smtClean="0"/>
-              <a:t>3/7/24</a:t>
+              <a:t>10/20/25</a:t>
             </a:fld>
             <a:endParaRPr lang="en-US"/>
           </a:p>
@@ -909,6 +911,191 @@
               <a:defRPr/>
             </a:pPr>
             <a:r>
+              <a:rPr lang="en-US" i="1" dirty="0"/>
+              <a:t>Normal errors: </a:t>
+            </a:r>
+            <a:r>
+              <a:rPr lang="en-US" sz="1800" dirty="0">
+                <a:effectLst/>
+                <a:latin typeface="TimesNewRomanPSMT"/>
+              </a:rPr>
+              <a:t>the differences between the predicted and observed data are most frequently zero or very close to zero, and that differences much greater than zero happen only occasionally. Some people confuse this assumption with the idea that predictors have to be normally distributed, which they don’t. </a:t>
+            </a:r>
+          </a:p>
+          <a:p>
+            <a:pPr marL="0" marR="0" lvl="0" indent="0" algn="l" defTabSz="914400" rtl="0" eaLnBrk="1" fontAlgn="auto" latinLnBrk="0" hangingPunct="1">
+              <a:lnSpc>
+                <a:spcPct val="100000"/>
+              </a:lnSpc>
+              <a:spcBef>
+                <a:spcPts val="0"/>
+              </a:spcBef>
+              <a:spcAft>
+                <a:spcPts val="0"/>
+              </a:spcAft>
+              <a:buClrTx/>
+              <a:buSzTx/>
+              <a:buFontTx/>
+              <a:buNone/>
+              <a:tabLst/>
+              <a:defRPr/>
+            </a:pPr>
+            <a:r>
+              <a:rPr lang="en-US" sz="1800" dirty="0">
+                <a:effectLst/>
+                <a:latin typeface="TimesNewRomanPSMT"/>
+              </a:rPr>
+              <a:t>In small samples a lack of normality invalidates confidence intervals and significance tests, whereas in large samples it will not because of the central limit theorem. If you are concerned only with estimating the model parameters (and not significance tests and confidence intervals) then this assumption barely matters. If you bootstrap confidence intervals then you can ignore this assumption. </a:t>
+            </a:r>
+          </a:p>
+          <a:p>
+            <a:pPr marL="0" marR="0" lvl="0" indent="0" algn="l" defTabSz="914400" rtl="0" eaLnBrk="1" fontAlgn="auto" latinLnBrk="0" hangingPunct="1">
+              <a:lnSpc>
+                <a:spcPct val="100000"/>
+              </a:lnSpc>
+              <a:spcBef>
+                <a:spcPts val="0"/>
+              </a:spcBef>
+              <a:spcAft>
+                <a:spcPts val="0"/>
+              </a:spcAft>
+              <a:buClrTx/>
+              <a:buSzTx/>
+              <a:buFontTx/>
+              <a:buNone/>
+              <a:tabLst/>
+              <a:defRPr/>
+            </a:pPr>
+            <a:endParaRPr lang="en-US" sz="1800" dirty="0">
+              <a:effectLst/>
+              <a:latin typeface="TimesNewRomanPSMT"/>
+            </a:endParaRPr>
+          </a:p>
+          <a:p>
+            <a:pPr marL="0" marR="0" lvl="0" indent="0" algn="l" defTabSz="914400" rtl="0" eaLnBrk="1" fontAlgn="auto" latinLnBrk="0" hangingPunct="1">
+              <a:lnSpc>
+                <a:spcPct val="100000"/>
+              </a:lnSpc>
+              <a:spcBef>
+                <a:spcPts val="0"/>
+              </a:spcBef>
+              <a:spcAft>
+                <a:spcPts val="0"/>
+              </a:spcAft>
+              <a:buClrTx/>
+              <a:buSzTx/>
+              <a:buFontTx/>
+              <a:buNone/>
+              <a:tabLst/>
+              <a:defRPr/>
+            </a:pPr>
+            <a:endParaRPr lang="en-US" dirty="0">
+              <a:effectLst/>
+            </a:endParaRPr>
+          </a:p>
+          <a:p>
+            <a:endParaRPr lang="en-US" i="1" dirty="0"/>
+          </a:p>
+        </p:txBody>
+      </p:sp>
+      <p:sp>
+        <p:nvSpPr>
+          <p:cNvPr id="4" name="Slide Number Placeholder 3"/>
+          <p:cNvSpPr>
+            <a:spLocks noGrp="1"/>
+          </p:cNvSpPr>
+          <p:nvPr>
+            <p:ph type="sldNum" sz="quarter" idx="5"/>
+          </p:nvPr>
+        </p:nvSpPr>
+        <p:spPr/>
+        <p:txBody>
+          <a:bodyPr/>
+          <a:lstStyle/>
+          <a:p>
+            <a:fld id="{66610047-E131-0346-ABBC-77645D001C55}" type="slidenum">
+              <a:rPr lang="en-US" smtClean="0"/>
+              <a:t>8</a:t>
+            </a:fld>
+            <a:endParaRPr lang="en-US"/>
+          </a:p>
+        </p:txBody>
+      </p:sp>
+    </p:spTree>
+    <p:extLst>
+      <p:ext uri="{BB962C8B-B14F-4D97-AF65-F5344CB8AC3E}">
+        <p14:creationId xmlns:p14="http://schemas.microsoft.com/office/powerpoint/2010/main" val="3427394577"/>
+      </p:ext>
+    </p:extLst>
+  </p:cSld>
+  <p:clrMapOvr>
+    <a:masterClrMapping/>
+  </p:clrMapOvr>
+</p:notes>
+</file>
+
+<file path=ppt/notesSlides/notesSlide6.xml><?xml version="1.0" encoding="utf-8"?>
+<p:notes xmlns:a="http://schemas.openxmlformats.org/drawingml/2006/main" xmlns:r="http://schemas.openxmlformats.org/officeDocument/2006/relationships" xmlns:p="http://schemas.openxmlformats.org/presentationml/2006/main">
+  <p:cSld>
+    <p:spTree>
+      <p:nvGrpSpPr>
+        <p:cNvPr id="1" name=""/>
+        <p:cNvGrpSpPr/>
+        <p:nvPr/>
+      </p:nvGrpSpPr>
+      <p:grpSpPr>
+        <a:xfrm>
+          <a:off x="0" y="0"/>
+          <a:ext cx="0" cy="0"/>
+          <a:chOff x="0" y="0"/>
+          <a:chExt cx="0" cy="0"/>
+        </a:xfrm>
+      </p:grpSpPr>
+      <p:sp>
+        <p:nvSpPr>
+          <p:cNvPr id="2" name="Slide Image Placeholder 1"/>
+          <p:cNvSpPr>
+            <a:spLocks noGrp="1" noRot="1" noChangeAspect="1"/>
+          </p:cNvSpPr>
+          <p:nvPr>
+            <p:ph type="sldImg"/>
+          </p:nvPr>
+        </p:nvSpPr>
+        <p:spPr/>
+      </p:sp>
+      <p:sp>
+        <p:nvSpPr>
+          <p:cNvPr id="3" name="Notes Placeholder 2"/>
+          <p:cNvSpPr>
+            <a:spLocks noGrp="1"/>
+          </p:cNvSpPr>
+          <p:nvPr>
+            <p:ph type="body" idx="1"/>
+          </p:nvPr>
+        </p:nvSpPr>
+        <p:spPr/>
+        <p:txBody>
+          <a:bodyPr/>
+          <a:lstStyle/>
+          <a:p>
+            <a:pPr marL="0" marR="0" lvl="0" indent="0" algn="l" defTabSz="914400" rtl="0" eaLnBrk="1" fontAlgn="auto" latinLnBrk="0" hangingPunct="1">
+              <a:lnSpc>
+                <a:spcPct val="100000"/>
+              </a:lnSpc>
+              <a:spcBef>
+                <a:spcPts val="0"/>
+              </a:spcBef>
+              <a:spcAft>
+                <a:spcPts val="0"/>
+              </a:spcAft>
+              <a:buClrTx/>
+              <a:buSzTx/>
+              <a:buFontTx/>
+              <a:buNone/>
+              <a:tabLst/>
+              <a:defRPr/>
+            </a:pPr>
+            <a:r>
               <a:rPr lang="en-GB" sz="1200" dirty="0"/>
               <a:t>When data violate the assumptions of parametric tests we can sometimes find a nonparametric equivalent</a:t>
             </a:r>
@@ -935,7 +1122,7 @@
           <a:p>
             <a:fld id="{66610047-E131-0346-ABBC-77645D001C55}" type="slidenum">
               <a:rPr lang="en-US" smtClean="0"/>
-              <a:t>9</a:t>
+              <a:t>11</a:t>
             </a:fld>
             <a:endParaRPr lang="en-US"/>
           </a:p>
@@ -1101,7 +1288,7 @@
           <a:p>
             <a:fld id="{BA763BF8-AC66-E249-9CE8-8353EEB16B82}" type="datetimeFigureOut">
               <a:rPr lang="en-US" smtClean="0"/>
-              <a:t>3/7/24</a:t>
+              <a:t>10/20/25</a:t>
             </a:fld>
             <a:endParaRPr lang="en-US"/>
           </a:p>
@@ -1303,7 +1490,7 @@
           <a:p>
             <a:fld id="{BA763BF8-AC66-E249-9CE8-8353EEB16B82}" type="datetimeFigureOut">
               <a:rPr lang="en-US" smtClean="0"/>
-              <a:t>3/7/24</a:t>
+              <a:t>10/20/25</a:t>
             </a:fld>
             <a:endParaRPr lang="en-US"/>
           </a:p>
@@ -1511,7 +1698,7 @@
           <a:p>
             <a:fld id="{BA763BF8-AC66-E249-9CE8-8353EEB16B82}" type="datetimeFigureOut">
               <a:rPr lang="en-US" smtClean="0"/>
-              <a:t>3/7/24</a:t>
+              <a:t>10/20/25</a:t>
             </a:fld>
             <a:endParaRPr lang="en-US"/>
           </a:p>
@@ -1713,7 +1900,7 @@
           <a:p>
             <a:fld id="{BA763BF8-AC66-E249-9CE8-8353EEB16B82}" type="datetimeFigureOut">
               <a:rPr lang="en-US" smtClean="0"/>
-              <a:t>3/7/24</a:t>
+              <a:t>10/20/25</a:t>
             </a:fld>
             <a:endParaRPr lang="en-US"/>
           </a:p>
@@ -1988,7 +2175,7 @@
           <a:p>
             <a:fld id="{BA763BF8-AC66-E249-9CE8-8353EEB16B82}" type="datetimeFigureOut">
               <a:rPr lang="en-US" smtClean="0"/>
-              <a:t>3/7/24</a:t>
+              <a:t>10/20/25</a:t>
             </a:fld>
             <a:endParaRPr lang="en-US"/>
           </a:p>
@@ -2257,7 +2444,7 @@
           <a:p>
             <a:fld id="{BA763BF8-AC66-E249-9CE8-8353EEB16B82}" type="datetimeFigureOut">
               <a:rPr lang="en-US" smtClean="0"/>
-              <a:t>3/7/24</a:t>
+              <a:t>10/20/25</a:t>
             </a:fld>
             <a:endParaRPr lang="en-US"/>
           </a:p>
@@ -2673,7 +2860,7 @@
           <a:p>
             <a:fld id="{BA763BF8-AC66-E249-9CE8-8353EEB16B82}" type="datetimeFigureOut">
               <a:rPr lang="en-US" smtClean="0"/>
-              <a:t>3/7/24</a:t>
+              <a:t>10/20/25</a:t>
             </a:fld>
             <a:endParaRPr lang="en-US"/>
           </a:p>
@@ -2818,7 +3005,7 @@
           <a:p>
             <a:fld id="{BA763BF8-AC66-E249-9CE8-8353EEB16B82}" type="datetimeFigureOut">
               <a:rPr lang="en-US" smtClean="0"/>
-              <a:t>3/7/24</a:t>
+              <a:t>10/20/25</a:t>
             </a:fld>
             <a:endParaRPr lang="en-US"/>
           </a:p>
@@ -2931,7 +3118,7 @@
           <a:p>
             <a:fld id="{BA763BF8-AC66-E249-9CE8-8353EEB16B82}" type="datetimeFigureOut">
               <a:rPr lang="en-US" smtClean="0"/>
-              <a:t>3/7/24</a:t>
+              <a:t>10/20/25</a:t>
             </a:fld>
             <a:endParaRPr lang="en-US"/>
           </a:p>
@@ -3242,7 +3429,7 @@
           <a:p>
             <a:fld id="{BA763BF8-AC66-E249-9CE8-8353EEB16B82}" type="datetimeFigureOut">
               <a:rPr lang="en-US" smtClean="0"/>
-              <a:t>3/7/24</a:t>
+              <a:t>10/20/25</a:t>
             </a:fld>
             <a:endParaRPr lang="en-US"/>
           </a:p>
@@ -3530,7 +3717,7 @@
           <a:p>
             <a:fld id="{BA763BF8-AC66-E249-9CE8-8353EEB16B82}" type="datetimeFigureOut">
               <a:rPr lang="en-US" smtClean="0"/>
-              <a:t>3/7/24</a:t>
+              <a:t>10/20/25</a:t>
             </a:fld>
             <a:endParaRPr lang="en-US"/>
           </a:p>
@@ -3774,7 +3961,7 @@
             <a:fld id="{BA763BF8-AC66-E249-9CE8-8353EEB16B82}" type="datetimeFigureOut">
               <a:rPr lang="en-US" smtClean="0"/>
               <a:pPr/>
-              <a:t>3/7/24</a:t>
+              <a:t>10/20/25</a:t>
             </a:fld>
             <a:endParaRPr lang="en-US"/>
           </a:p>
@@ -4287,6 +4474,505 @@
   <p:cSld>
     <p:spTree>
       <p:nvGrpSpPr>
+        <p:cNvPr id="1" name="">
+          <a:extLst>
+            <a:ext uri="{FF2B5EF4-FFF2-40B4-BE49-F238E27FC236}">
+              <a16:creationId xmlns:a16="http://schemas.microsoft.com/office/drawing/2014/main" id="{821396F7-A85F-C804-370D-05A85D06E2B7}"/>
+            </a:ext>
+          </a:extLst>
+        </p:cNvPr>
+        <p:cNvGrpSpPr/>
+        <p:nvPr/>
+      </p:nvGrpSpPr>
+      <p:grpSpPr>
+        <a:xfrm>
+          <a:off x="0" y="0"/>
+          <a:ext cx="0" cy="0"/>
+          <a:chOff x="0" y="0"/>
+          <a:chExt cx="0" cy="0"/>
+        </a:xfrm>
+      </p:grpSpPr>
+      <p:sp>
+        <p:nvSpPr>
+          <p:cNvPr id="2" name="Title 1">
+            <a:extLst>
+              <a:ext uri="{FF2B5EF4-FFF2-40B4-BE49-F238E27FC236}">
+                <a16:creationId xmlns:a16="http://schemas.microsoft.com/office/drawing/2014/main" id="{FF75DE49-BD37-9BB3-B6AE-5A243324F887}"/>
+              </a:ext>
+            </a:extLst>
+          </p:cNvPr>
+          <p:cNvSpPr>
+            <a:spLocks noGrp="1"/>
+          </p:cNvSpPr>
+          <p:nvPr>
+            <p:ph type="title"/>
+          </p:nvPr>
+        </p:nvSpPr>
+        <p:spPr/>
+        <p:txBody>
+          <a:bodyPr/>
+          <a:lstStyle/>
+          <a:p>
+            <a:r>
+              <a:rPr lang="en-GB" dirty="0"/>
+              <a:t>Assumptions</a:t>
+            </a:r>
+          </a:p>
+        </p:txBody>
+      </p:sp>
+      <p:sp>
+        <p:nvSpPr>
+          <p:cNvPr id="3" name="Content Placeholder 2">
+            <a:extLst>
+              <a:ext uri="{FF2B5EF4-FFF2-40B4-BE49-F238E27FC236}">
+                <a16:creationId xmlns:a16="http://schemas.microsoft.com/office/drawing/2014/main" id="{8A64F4E1-E2C9-6C58-E47D-FD40BBDDA832}"/>
+              </a:ext>
+            </a:extLst>
+          </p:cNvPr>
+          <p:cNvSpPr>
+            <a:spLocks noGrp="1"/>
+          </p:cNvSpPr>
+          <p:nvPr>
+            <p:ph idx="1"/>
+          </p:nvPr>
+        </p:nvSpPr>
+        <p:spPr>
+          <a:xfrm>
+            <a:off x="838200" y="1548752"/>
+            <a:ext cx="10515600" cy="4351338"/>
+          </a:xfrm>
+        </p:spPr>
+        <p:txBody>
+          <a:bodyPr>
+            <a:noAutofit/>
+          </a:bodyPr>
+          <a:lstStyle/>
+          <a:p>
+            <a:pPr>
+              <a:lnSpc>
+                <a:spcPct val="100000"/>
+              </a:lnSpc>
+            </a:pPr>
+            <a:r>
+              <a:rPr lang="en-GB" dirty="0"/>
+              <a:t>The outcome is measured at least at the interval level. For ordinal data, see “Non-parametric tests”</a:t>
+            </a:r>
+          </a:p>
+          <a:p>
+            <a:pPr lvl="1"/>
+            <a:endParaRPr lang="en-GB" dirty="0"/>
+          </a:p>
+          <a:p>
+            <a:endParaRPr lang="en-GB" sz="2400" dirty="0"/>
+          </a:p>
+        </p:txBody>
+      </p:sp>
+    </p:spTree>
+    <p:extLst>
+      <p:ext uri="{BB962C8B-B14F-4D97-AF65-F5344CB8AC3E}">
+        <p14:creationId xmlns:p14="http://schemas.microsoft.com/office/powerpoint/2010/main" val="3734642753"/>
+      </p:ext>
+    </p:extLst>
+  </p:cSld>
+  <p:clrMapOvr>
+    <a:masterClrMapping/>
+  </p:clrMapOvr>
+  <p:timing>
+    <p:tnLst>
+      <p:par>
+        <p:cTn id="1" dur="indefinite" restart="never" nodeType="tmRoot">
+          <p:childTnLst>
+            <p:seq concurrent="1" nextAc="seek">
+              <p:cTn id="2" dur="indefinite" nodeType="mainSeq">
+                <p:childTnLst>
+                  <p:par>
+                    <p:cTn id="3" fill="hold">
+                      <p:stCondLst>
+                        <p:cond delay="indefinite"/>
+                      </p:stCondLst>
+                      <p:childTnLst>
+                        <p:par>
+                          <p:cTn id="4" fill="hold">
+                            <p:stCondLst>
+                              <p:cond delay="0"/>
+                            </p:stCondLst>
+                            <p:childTnLst>
+                              <p:par>
+                                <p:cTn id="5" presetID="1" presetClass="entr" presetSubtype="0" fill="hold" grpId="0" nodeType="clickEffect">
+                                  <p:stCondLst>
+                                    <p:cond delay="0"/>
+                                  </p:stCondLst>
+                                  <p:childTnLst>
+                                    <p:set>
+                                      <p:cBhvr>
+                                        <p:cTn id="6" dur="1" fill="hold">
+                                          <p:stCondLst>
+                                            <p:cond delay="0"/>
+                                          </p:stCondLst>
+                                        </p:cTn>
+                                        <p:tgtEl>
+                                          <p:spTgt spid="3">
+                                            <p:txEl>
+                                              <p:pRg st="0" end="0"/>
+                                            </p:txEl>
+                                          </p:spTgt>
+                                        </p:tgtEl>
+                                        <p:attrNameLst>
+                                          <p:attrName>style.visibility</p:attrName>
+                                        </p:attrNameLst>
+                                      </p:cBhvr>
+                                      <p:to>
+                                        <p:strVal val="visible"/>
+                                      </p:to>
+                                    </p:set>
+                                  </p:childTnLst>
+                                </p:cTn>
+                              </p:par>
+                            </p:childTnLst>
+                          </p:cTn>
+                        </p:par>
+                      </p:childTnLst>
+                    </p:cTn>
+                  </p:par>
+                </p:childTnLst>
+              </p:cTn>
+              <p:prevCondLst>
+                <p:cond evt="onPrev" delay="0">
+                  <p:tgtEl>
+                    <p:sldTgt/>
+                  </p:tgtEl>
+                </p:cond>
+              </p:prevCondLst>
+              <p:nextCondLst>
+                <p:cond evt="onNext" delay="0">
+                  <p:tgtEl>
+                    <p:sldTgt/>
+                  </p:tgtEl>
+                </p:cond>
+              </p:nextCondLst>
+            </p:seq>
+          </p:childTnLst>
+        </p:cTn>
+      </p:par>
+    </p:tnLst>
+    <p:bldLst>
+      <p:bldP spid="3" grpId="0" build="p"/>
+    </p:bldLst>
+  </p:timing>
+</p:sld>
+</file>
+
+<file path=ppt/slides/slide11.xml><?xml version="1.0" encoding="utf-8"?>
+<p:sld xmlns:a="http://schemas.openxmlformats.org/drawingml/2006/main" xmlns:r="http://schemas.openxmlformats.org/officeDocument/2006/relationships" xmlns:p="http://schemas.openxmlformats.org/presentationml/2006/main">
+  <p:cSld>
+    <p:spTree>
+      <p:nvGrpSpPr>
+        <p:cNvPr id="1" name=""/>
+        <p:cNvGrpSpPr/>
+        <p:nvPr/>
+      </p:nvGrpSpPr>
+      <p:grpSpPr>
+        <a:xfrm>
+          <a:off x="0" y="0"/>
+          <a:ext cx="0" cy="0"/>
+          <a:chOff x="0" y="0"/>
+          <a:chExt cx="0" cy="0"/>
+        </a:xfrm>
+      </p:grpSpPr>
+      <p:sp>
+        <p:nvSpPr>
+          <p:cNvPr id="2" name="Title 1"/>
+          <p:cNvSpPr>
+            <a:spLocks noGrp="1"/>
+          </p:cNvSpPr>
+          <p:nvPr>
+            <p:ph type="title"/>
+          </p:nvPr>
+        </p:nvSpPr>
+        <p:spPr/>
+        <p:txBody>
+          <a:bodyPr/>
+          <a:lstStyle/>
+          <a:p>
+            <a:r>
+              <a:rPr lang="en-GB" dirty="0"/>
+              <a:t>Non-Parametric Tests</a:t>
+            </a:r>
+          </a:p>
+        </p:txBody>
+      </p:sp>
+      <p:sp>
+        <p:nvSpPr>
+          <p:cNvPr id="3" name="Content Placeholder 2"/>
+          <p:cNvSpPr>
+            <a:spLocks noGrp="1"/>
+          </p:cNvSpPr>
+          <p:nvPr>
+            <p:ph idx="1"/>
+          </p:nvPr>
+        </p:nvSpPr>
+        <p:spPr>
+          <a:xfrm>
+            <a:off x="838200" y="1586474"/>
+            <a:ext cx="10515600" cy="4351338"/>
+          </a:xfrm>
+        </p:spPr>
+        <p:txBody>
+          <a:bodyPr>
+            <a:normAutofit/>
+          </a:bodyPr>
+          <a:lstStyle/>
+          <a:p>
+            <a:r>
+              <a:rPr lang="en-GB" sz="3500" dirty="0"/>
+              <a:t>Mann-Whitney/Wilcoxon rank-sum Test</a:t>
+            </a:r>
+          </a:p>
+          <a:p>
+            <a:pPr lvl="1"/>
+            <a:r>
+              <a:rPr lang="en-GB" sz="3500" dirty="0"/>
+              <a:t>Compares two independent groups of scores</a:t>
+            </a:r>
+          </a:p>
+          <a:p>
+            <a:r>
+              <a:rPr lang="en-GB" sz="3500" dirty="0"/>
+              <a:t>Wilcoxon signed rank Test</a:t>
+            </a:r>
+          </a:p>
+          <a:p>
+            <a:pPr lvl="1"/>
+            <a:r>
+              <a:rPr lang="en-GB" sz="3500" dirty="0"/>
+              <a:t>Compares two dependent groups of scores</a:t>
+            </a:r>
+          </a:p>
+          <a:p>
+            <a:pPr marL="0" indent="0">
+              <a:buNone/>
+            </a:pPr>
+            <a:endParaRPr lang="en-GB" dirty="0"/>
+          </a:p>
+          <a:p>
+            <a:endParaRPr lang="en-GB" dirty="0"/>
+          </a:p>
+          <a:p>
+            <a:endParaRPr lang="en-GB" dirty="0"/>
+          </a:p>
+        </p:txBody>
+      </p:sp>
+    </p:spTree>
+    <p:extLst>
+      <p:ext uri="{BB962C8B-B14F-4D97-AF65-F5344CB8AC3E}">
+        <p14:creationId xmlns:p14="http://schemas.microsoft.com/office/powerpoint/2010/main" val="290789418"/>
+      </p:ext>
+    </p:extLst>
+  </p:cSld>
+  <p:clrMapOvr>
+    <a:masterClrMapping/>
+  </p:clrMapOvr>
+  <p:timing>
+    <p:tnLst>
+      <p:par>
+        <p:cTn id="1" dur="indefinite" restart="never" nodeType="tmRoot">
+          <p:childTnLst>
+            <p:seq concurrent="1" nextAc="seek">
+              <p:cTn id="2" dur="indefinite" nodeType="mainSeq">
+                <p:childTnLst>
+                  <p:par>
+                    <p:cTn id="3" fill="hold">
+                      <p:stCondLst>
+                        <p:cond delay="indefinite"/>
+                      </p:stCondLst>
+                      <p:childTnLst>
+                        <p:par>
+                          <p:cTn id="4" fill="hold">
+                            <p:stCondLst>
+                              <p:cond delay="0"/>
+                            </p:stCondLst>
+                            <p:childTnLst>
+                              <p:par>
+                                <p:cTn id="5" presetID="1" presetClass="entr" presetSubtype="0" fill="hold" grpId="0" nodeType="clickEffect">
+                                  <p:stCondLst>
+                                    <p:cond delay="0"/>
+                                  </p:stCondLst>
+                                  <p:childTnLst>
+                                    <p:set>
+                                      <p:cBhvr>
+                                        <p:cTn id="6" dur="1" fill="hold">
+                                          <p:stCondLst>
+                                            <p:cond delay="0"/>
+                                          </p:stCondLst>
+                                        </p:cTn>
+                                        <p:tgtEl>
+                                          <p:spTgt spid="3">
+                                            <p:txEl>
+                                              <p:pRg st="0" end="0"/>
+                                            </p:txEl>
+                                          </p:spTgt>
+                                        </p:tgtEl>
+                                        <p:attrNameLst>
+                                          <p:attrName>style.visibility</p:attrName>
+                                        </p:attrNameLst>
+                                      </p:cBhvr>
+                                      <p:to>
+                                        <p:strVal val="visible"/>
+                                      </p:to>
+                                    </p:set>
+                                  </p:childTnLst>
+                                </p:cTn>
+                              </p:par>
+                              <p:par>
+                                <p:cTn id="7" presetID="1" presetClass="entr" presetSubtype="0" fill="hold" grpId="0" nodeType="withEffect">
+                                  <p:stCondLst>
+                                    <p:cond delay="0"/>
+                                  </p:stCondLst>
+                                  <p:childTnLst>
+                                    <p:set>
+                                      <p:cBhvr>
+                                        <p:cTn id="8" dur="1" fill="hold">
+                                          <p:stCondLst>
+                                            <p:cond delay="0"/>
+                                          </p:stCondLst>
+                                        </p:cTn>
+                                        <p:tgtEl>
+                                          <p:spTgt spid="3">
+                                            <p:txEl>
+                                              <p:pRg st="1" end="1"/>
+                                            </p:txEl>
+                                          </p:spTgt>
+                                        </p:tgtEl>
+                                        <p:attrNameLst>
+                                          <p:attrName>style.visibility</p:attrName>
+                                        </p:attrNameLst>
+                                      </p:cBhvr>
+                                      <p:to>
+                                        <p:strVal val="visible"/>
+                                      </p:to>
+                                    </p:set>
+                                  </p:childTnLst>
+                                </p:cTn>
+                              </p:par>
+                            </p:childTnLst>
+                          </p:cTn>
+                        </p:par>
+                      </p:childTnLst>
+                    </p:cTn>
+                  </p:par>
+                  <p:par>
+                    <p:cTn id="9" fill="hold">
+                      <p:stCondLst>
+                        <p:cond delay="indefinite"/>
+                      </p:stCondLst>
+                      <p:childTnLst>
+                        <p:par>
+                          <p:cTn id="10" fill="hold">
+                            <p:stCondLst>
+                              <p:cond delay="0"/>
+                            </p:stCondLst>
+                            <p:childTnLst>
+                              <p:par>
+                                <p:cTn id="11" presetID="1" presetClass="entr" presetSubtype="0" fill="hold" grpId="0" nodeType="clickEffect">
+                                  <p:stCondLst>
+                                    <p:cond delay="0"/>
+                                  </p:stCondLst>
+                                  <p:childTnLst>
+                                    <p:set>
+                                      <p:cBhvr>
+                                        <p:cTn id="12" dur="1" fill="hold">
+                                          <p:stCondLst>
+                                            <p:cond delay="0"/>
+                                          </p:stCondLst>
+                                        </p:cTn>
+                                        <p:tgtEl>
+                                          <p:spTgt spid="3">
+                                            <p:txEl>
+                                              <p:pRg st="2" end="2"/>
+                                            </p:txEl>
+                                          </p:spTgt>
+                                        </p:tgtEl>
+                                        <p:attrNameLst>
+                                          <p:attrName>style.visibility</p:attrName>
+                                        </p:attrNameLst>
+                                      </p:cBhvr>
+                                      <p:to>
+                                        <p:strVal val="visible"/>
+                                      </p:to>
+                                    </p:set>
+                                  </p:childTnLst>
+                                </p:cTn>
+                              </p:par>
+                              <p:par>
+                                <p:cTn id="13" presetID="1" presetClass="entr" presetSubtype="0" fill="hold" grpId="0" nodeType="withEffect">
+                                  <p:stCondLst>
+                                    <p:cond delay="0"/>
+                                  </p:stCondLst>
+                                  <p:childTnLst>
+                                    <p:set>
+                                      <p:cBhvr>
+                                        <p:cTn id="14" dur="1" fill="hold">
+                                          <p:stCondLst>
+                                            <p:cond delay="0"/>
+                                          </p:stCondLst>
+                                        </p:cTn>
+                                        <p:tgtEl>
+                                          <p:spTgt spid="3">
+                                            <p:txEl>
+                                              <p:pRg st="3" end="3"/>
+                                            </p:txEl>
+                                          </p:spTgt>
+                                        </p:tgtEl>
+                                        <p:attrNameLst>
+                                          <p:attrName>style.visibility</p:attrName>
+                                        </p:attrNameLst>
+                                      </p:cBhvr>
+                                      <p:to>
+                                        <p:strVal val="visible"/>
+                                      </p:to>
+                                    </p:set>
+                                  </p:childTnLst>
+                                </p:cTn>
+                              </p:par>
+                            </p:childTnLst>
+                          </p:cTn>
+                        </p:par>
+                      </p:childTnLst>
+                    </p:cTn>
+                  </p:par>
+                </p:childTnLst>
+              </p:cTn>
+              <p:prevCondLst>
+                <p:cond evt="onPrev" delay="0">
+                  <p:tgtEl>
+                    <p:sldTgt/>
+                  </p:tgtEl>
+                </p:cond>
+              </p:prevCondLst>
+              <p:nextCondLst>
+                <p:cond evt="onNext" delay="0">
+                  <p:tgtEl>
+                    <p:sldTgt/>
+                  </p:tgtEl>
+                </p:cond>
+              </p:nextCondLst>
+            </p:seq>
+          </p:childTnLst>
+        </p:cTn>
+      </p:par>
+    </p:tnLst>
+    <p:bldLst>
+      <p:bldP spid="3" grpId="0" build="p"/>
+    </p:bldLst>
+  </p:timing>
+</p:sld>
+</file>
+
+<file path=ppt/slides/slide12.xml><?xml version="1.0" encoding="utf-8"?>
+<p:sld xmlns:a="http://schemas.openxmlformats.org/drawingml/2006/main" xmlns:r="http://schemas.openxmlformats.org/officeDocument/2006/relationships" xmlns:p="http://schemas.openxmlformats.org/presentationml/2006/main">
+  <p:cSld>
+    <p:spTree>
+      <p:nvGrpSpPr>
         <p:cNvPr id="1" name=""/>
         <p:cNvGrpSpPr/>
         <p:nvPr/>
@@ -4622,7 +5308,7 @@
 </p:sld>
 </file>
 
-<file path=ppt/slides/slide11.xml><?xml version="1.0" encoding="utf-8"?>
+<file path=ppt/slides/slide13.xml><?xml version="1.0" encoding="utf-8"?>
 <p:sld xmlns:a="http://schemas.openxmlformats.org/drawingml/2006/main" xmlns:r="http://schemas.openxmlformats.org/officeDocument/2006/relationships" xmlns:p="http://schemas.openxmlformats.org/presentationml/2006/main">
   <p:cSld>
     <p:spTree>
@@ -4820,7 +5506,7 @@
 </p:sld>
 </file>
 
-<file path=ppt/slides/slide12.xml><?xml version="1.0" encoding="utf-8"?>
+<file path=ppt/slides/slide14.xml><?xml version="1.0" encoding="utf-8"?>
 <p:sld xmlns:a="http://schemas.openxmlformats.org/drawingml/2006/main" xmlns:r="http://schemas.openxmlformats.org/officeDocument/2006/relationships" xmlns:p="http://schemas.openxmlformats.org/presentationml/2006/main">
   <p:cSld>
     <p:bg>
@@ -4990,7 +5676,7 @@
 </p:sld>
 </file>
 
-<file path=ppt/slides/slide13.xml><?xml version="1.0" encoding="utf-8"?>
+<file path=ppt/slides/slide15.xml><?xml version="1.0" encoding="utf-8"?>
 <p:sld xmlns:a="http://schemas.openxmlformats.org/drawingml/2006/main" xmlns:r="http://schemas.openxmlformats.org/officeDocument/2006/relationships" xmlns:p="http://schemas.openxmlformats.org/presentationml/2006/main">
   <p:cSld>
     <p:bg>
@@ -5628,7 +6314,7 @@
           <a:p>
             <a:r>
               <a:rPr lang="en-GB" sz="3200" dirty="0"/>
-              <a:t>This situation can be analysed with a </a:t>
+              <a:t>means of each IV level can be compared with a </a:t>
             </a:r>
             <a:r>
               <a:rPr lang="en-GB" sz="3200" i="1" dirty="0"/>
@@ -5887,7 +6573,7 @@
           <a:p>
             <a:r>
               <a:rPr lang="en-GB" sz="3200" dirty="0"/>
-              <a:t>Independent </a:t>
+              <a:t>Independent samples </a:t>
             </a:r>
             <a:r>
               <a:rPr lang="en-GB" sz="3200" i="1" dirty="0"/>
@@ -5919,7 +6605,7 @@
           <a:p>
             <a:r>
               <a:rPr lang="en-GB" sz="3200" dirty="0"/>
-              <a:t>Dependent </a:t>
+              <a:t>Dependent samples </a:t>
             </a:r>
             <a:r>
               <a:rPr lang="en-GB" sz="3200" i="1" dirty="0"/>
@@ -5941,14 +6627,7 @@
             <a:pPr lvl="1"/>
             <a:r>
               <a:rPr lang="en-GB" sz="3000" dirty="0"/>
-              <a:t>E.g., Same people measured at different times.</a:t>
-            </a:r>
-          </a:p>
-          <a:p>
-            <a:pPr lvl="1"/>
-            <a:r>
-              <a:rPr lang="en-GB" sz="3000" dirty="0"/>
-              <a:t>Data from ‘matched’ samples.</a:t>
+              <a:t>E.g., Same people measured at different times, Data from ‘matched’ samples.</a:t>
             </a:r>
           </a:p>
           <a:p>
@@ -6191,37 +6870,6 @@
                                   </p:childTnLst>
                                 </p:cTn>
                               </p:par>
-                              <p:par>
-                                <p:cTn id="19" presetID="1" presetClass="entr" presetSubtype="0" fill="hold" grpId="0" nodeType="withEffect">
-                                  <p:stCondLst>
-                                    <p:cond delay="0"/>
-                                  </p:stCondLst>
-                                  <p:childTnLst>
-                                    <p:set>
-                                      <p:cBhvr>
-                                        <p:cTn id="20" dur="1" fill="hold">
-                                          <p:stCondLst>
-                                            <p:cond delay="0"/>
-                                          </p:stCondLst>
-                                        </p:cTn>
-                                        <p:tgtEl>
-                                          <p:spTgt spid="3">
-                                            <p:txEl>
-                                              <p:pRg st="8" end="8"/>
-                                            </p:txEl>
-                                          </p:spTgt>
-                                        </p:tgtEl>
-                                        <p:attrNameLst>
-                                          <p:attrName>style.visibility</p:attrName>
-                                        </p:attrNameLst>
-                                      </p:cBhvr>
-                                      <p:to>
-                                        <p:strVal val="visible"/>
-                                      </p:to>
-                                    </p:set>
-                                  </p:childTnLst>
-                                </p:cTn>
-                              </p:par>
                             </p:childTnLst>
                           </p:cTn>
                         </p:par>
@@ -6316,7 +6964,7 @@
         <p:spPr/>
         <p:txBody>
           <a:bodyPr>
-            <a:normAutofit fontScale="70000" lnSpcReduction="20000"/>
+            <a:normAutofit fontScale="62500" lnSpcReduction="20000"/>
           </a:bodyPr>
           <a:lstStyle/>
           <a:p>
@@ -6353,12 +7001,28 @@
             </a:r>
             <a:r>
               <a:rPr lang="en-GB" sz="4600" b="1" i="1" dirty="0"/>
-              <a:t>infrequently</a:t>
-            </a:r>
+              <a:t>infrequently.</a:t>
+            </a:r>
+          </a:p>
+          <a:p>
+            <a:pPr lvl="0">
+              <a:lnSpc>
+                <a:spcPct val="120000"/>
+              </a:lnSpc>
+            </a:pPr>
             <a:r>
               <a:rPr lang="en-GB" sz="4600" dirty="0"/>
-              <a:t>. </a:t>
-            </a:r>
+              <a:t>How large is a large difference? The </a:t>
+            </a:r>
+            <a:r>
+              <a:rPr lang="en-GB" sz="4600" b="1" dirty="0"/>
+              <a:t>standard error </a:t>
+            </a:r>
+            <a:r>
+              <a:rPr lang="en-GB" sz="4600" dirty="0"/>
+              <a:t>of the mean tells us how much we expect a sample mean to vary</a:t>
+            </a:r>
+            <a:endParaRPr lang="en-GB" sz="4600" b="1" i="1" dirty="0"/>
           </a:p>
         </p:txBody>
       </p:sp>
@@ -6527,6 +7191,55 @@
                       </p:childTnLst>
                     </p:cTn>
                   </p:par>
+                  <p:par>
+                    <p:cTn id="15" fill="hold">
+                      <p:stCondLst>
+                        <p:cond delay="indefinite"/>
+                      </p:stCondLst>
+                      <p:childTnLst>
+                        <p:par>
+                          <p:cTn id="16" fill="hold">
+                            <p:stCondLst>
+                              <p:cond delay="0"/>
+                            </p:stCondLst>
+                            <p:childTnLst>
+                              <p:par>
+                                <p:cTn id="17" presetID="1" presetClass="entr" presetSubtype="0" fill="hold" grpId="0" nodeType="clickEffect">
+                                  <p:stCondLst>
+                                    <p:cond delay="0"/>
+                                  </p:stCondLst>
+                                  <p:childTnLst>
+                                    <p:set>
+                                      <p:cBhvr>
+                                        <p:cTn id="18" dur="1" fill="hold">
+                                          <p:stCondLst>
+                                            <p:cond delay="0"/>
+                                          </p:stCondLst>
+                                        </p:cTn>
+                                        <p:tgtEl>
+                                          <p:spTgt spid="3">
+                                            <p:txEl>
+                                              <p:pRg st="5" end="5"/>
+                                            </p:txEl>
+                                          </p:spTgt>
+                                        </p:tgtEl>
+                                        <p:attrNameLst>
+                                          <p:attrName>style.visibility</p:attrName>
+                                        </p:attrNameLst>
+                                      </p:cBhvr>
+                                      <p:to>
+                                        <p:strVal val="visible"/>
+                                      </p:to>
+                                    </p:set>
+                                  </p:childTnLst>
+                                </p:cTn>
+                              </p:par>
+                            </p:childTnLst>
+                          </p:cTn>
+                        </p:par>
+                      </p:childTnLst>
+                    </p:cTn>
+                  </p:par>
                 </p:childTnLst>
               </p:cTn>
               <p:prevCondLst>
@@ -6620,7 +7333,7 @@
         </p:spPr>
         <p:txBody>
           <a:bodyPr>
-            <a:normAutofit fontScale="40000" lnSpcReduction="20000"/>
+            <a:normAutofit fontScale="25000" lnSpcReduction="20000"/>
           </a:bodyPr>
           <a:lstStyle/>
           <a:p>
@@ -6631,11 +7344,11 @@
               <a:buNone/>
             </a:pPr>
             <a:r>
-              <a:rPr lang="en-GB" sz="6700" dirty="0"/>
+              <a:rPr lang="en-GB" sz="9800" dirty="0"/>
               <a:t>If the difference between the samples is larger than we would expect </a:t>
             </a:r>
             <a:r>
-              <a:rPr lang="en-GB" sz="6700" dirty="0">
+              <a:rPr lang="en-GB" sz="9800" dirty="0">
                 <a:solidFill>
                   <a:srgbClr val="FF0000"/>
                 </a:solidFill>
@@ -6643,7 +7356,7 @@
               <a:t>based on the standard error </a:t>
             </a:r>
             <a:r>
-              <a:rPr lang="en-GB" sz="6700" dirty="0"/>
+              <a:rPr lang="en-GB" sz="9800" dirty="0"/>
               <a:t>then one of two things has happened:</a:t>
             </a:r>
           </a:p>
@@ -6654,7 +7367,7 @@
               </a:lnSpc>
               <a:buNone/>
             </a:pPr>
-            <a:endParaRPr lang="en-GB" sz="6700" dirty="0"/>
+            <a:endParaRPr lang="en-GB" sz="9800" dirty="0"/>
           </a:p>
           <a:p>
             <a:pPr marL="457200" lvl="1" indent="0">
@@ -6664,8 +7377,8 @@
               <a:buNone/>
             </a:pPr>
             <a:r>
-              <a:rPr lang="en-GB" sz="6700" dirty="0"/>
-              <a:t>1. There is no true effect but sample means from our population fluctuate we happen to have collected two samples that produce very different means </a:t>
+              <a:rPr lang="en-GB" sz="9800" dirty="0"/>
+              <a:t>1. The two samples come from the same population (null hypothesis, no true effect) but because sample means fluctuate we happen to have collected two samples that produce different means </a:t>
             </a:r>
           </a:p>
           <a:p>
@@ -6675,7 +7388,7 @@
               </a:lnSpc>
               <a:buNone/>
             </a:pPr>
-            <a:endParaRPr lang="en-GB" sz="6700" dirty="0"/>
+            <a:endParaRPr lang="en-GB" sz="9800" dirty="0"/>
           </a:p>
           <a:p>
             <a:pPr marL="457200" lvl="1" indent="0">
@@ -6685,7 +7398,7 @@
               <a:buNone/>
             </a:pPr>
             <a:r>
-              <a:rPr lang="en-GB" sz="6700" dirty="0"/>
+              <a:rPr lang="en-GB" sz="9800" dirty="0"/>
               <a:t>2. The two samples come from different populations. In other words, the null hypothesis is unlikely</a:t>
             </a:r>
           </a:p>
@@ -6965,31 +7678,31 @@
               </a:lnSpc>
             </a:pPr>
             <a:r>
-              <a:rPr lang="en-GB" sz="3200" dirty="0"/>
+              <a:rPr lang="en-GB" sz="2400" dirty="0"/>
               <a:t>Both the independent </a:t>
             </a:r>
             <a:r>
-              <a:rPr lang="en-GB" sz="3200" i="1" dirty="0"/>
+              <a:rPr lang="en-GB" sz="2400" i="1" dirty="0"/>
               <a:t>t</a:t>
             </a:r>
             <a:r>
-              <a:rPr lang="en-GB" sz="3200" dirty="0"/>
+              <a:rPr lang="en-GB" sz="2400" dirty="0"/>
               <a:t>-test and the dependent </a:t>
             </a:r>
             <a:r>
-              <a:rPr lang="en-GB" sz="3200" i="1" dirty="0"/>
+              <a:rPr lang="en-GB" sz="2400" i="1" dirty="0"/>
               <a:t>t</a:t>
             </a:r>
             <a:r>
-              <a:rPr lang="en-GB" sz="3200" dirty="0"/>
+              <a:rPr lang="en-GB" sz="2400" dirty="0"/>
               <a:t>-test are </a:t>
             </a:r>
             <a:r>
-              <a:rPr lang="en-GB" sz="3200" i="1" dirty="0"/>
+              <a:rPr lang="en-GB" sz="2400" i="1" dirty="0"/>
               <a:t>parametric tests</a:t>
             </a:r>
             <a:r>
-              <a:rPr lang="en-GB" sz="3200" dirty="0"/>
+              <a:rPr lang="en-GB" sz="2400" dirty="0"/>
               <a:t> based on the normal distribution</a:t>
             </a:r>
           </a:p>
@@ -7000,8 +7713,727 @@
               </a:lnSpc>
             </a:pPr>
             <a:r>
-              <a:rPr lang="en-GB" sz="3200" dirty="0"/>
-              <a:t>Therefore, they assume:</a:t>
+              <a:rPr lang="en-GB" sz="2400" dirty="0"/>
+              <a:t>Both are instances of the General Linear Model (GLM), like correlation and linear regression</a:t>
+            </a:r>
+          </a:p>
+          <a:p>
+            <a:pPr>
+              <a:lnSpc>
+                <a:spcPct val="100000"/>
+              </a:lnSpc>
+            </a:pPr>
+            <a:r>
+              <a:rPr lang="en-GB" sz="2400" dirty="0"/>
+              <a:t>Assumptions:</a:t>
+            </a:r>
+          </a:p>
+          <a:p>
+            <a:pPr lvl="1"/>
+            <a:endParaRPr lang="en-GB" dirty="0"/>
+          </a:p>
+          <a:p>
+            <a:endParaRPr lang="en-GB" sz="2400" dirty="0"/>
+          </a:p>
+        </p:txBody>
+      </p:sp>
+    </p:spTree>
+    <p:extLst>
+      <p:ext uri="{BB962C8B-B14F-4D97-AF65-F5344CB8AC3E}">
+        <p14:creationId xmlns:p14="http://schemas.microsoft.com/office/powerpoint/2010/main" val="4241242777"/>
+      </p:ext>
+    </p:extLst>
+  </p:cSld>
+  <p:clrMapOvr>
+    <a:masterClrMapping/>
+  </p:clrMapOvr>
+  <p:timing>
+    <p:tnLst>
+      <p:par>
+        <p:cTn id="1" dur="indefinite" restart="never" nodeType="tmRoot">
+          <p:childTnLst>
+            <p:seq concurrent="1" nextAc="seek">
+              <p:cTn id="2" dur="indefinite" nodeType="mainSeq">
+                <p:childTnLst>
+                  <p:par>
+                    <p:cTn id="3" fill="hold">
+                      <p:stCondLst>
+                        <p:cond delay="indefinite"/>
+                      </p:stCondLst>
+                      <p:childTnLst>
+                        <p:par>
+                          <p:cTn id="4" fill="hold">
+                            <p:stCondLst>
+                              <p:cond delay="0"/>
+                            </p:stCondLst>
+                            <p:childTnLst>
+                              <p:par>
+                                <p:cTn id="5" presetID="1" presetClass="entr" presetSubtype="0" fill="hold" grpId="0" nodeType="clickEffect">
+                                  <p:stCondLst>
+                                    <p:cond delay="0"/>
+                                  </p:stCondLst>
+                                  <p:childTnLst>
+                                    <p:set>
+                                      <p:cBhvr>
+                                        <p:cTn id="6" dur="1" fill="hold">
+                                          <p:stCondLst>
+                                            <p:cond delay="0"/>
+                                          </p:stCondLst>
+                                        </p:cTn>
+                                        <p:tgtEl>
+                                          <p:spTgt spid="3">
+                                            <p:txEl>
+                                              <p:pRg st="0" end="0"/>
+                                            </p:txEl>
+                                          </p:spTgt>
+                                        </p:tgtEl>
+                                        <p:attrNameLst>
+                                          <p:attrName>style.visibility</p:attrName>
+                                        </p:attrNameLst>
+                                      </p:cBhvr>
+                                      <p:to>
+                                        <p:strVal val="visible"/>
+                                      </p:to>
+                                    </p:set>
+                                  </p:childTnLst>
+                                </p:cTn>
+                              </p:par>
+                            </p:childTnLst>
+                          </p:cTn>
+                        </p:par>
+                      </p:childTnLst>
+                    </p:cTn>
+                  </p:par>
+                  <p:par>
+                    <p:cTn id="7" fill="hold">
+                      <p:stCondLst>
+                        <p:cond delay="indefinite"/>
+                      </p:stCondLst>
+                      <p:childTnLst>
+                        <p:par>
+                          <p:cTn id="8" fill="hold">
+                            <p:stCondLst>
+                              <p:cond delay="0"/>
+                            </p:stCondLst>
+                            <p:childTnLst>
+                              <p:par>
+                                <p:cTn id="9" presetID="1" presetClass="entr" presetSubtype="0" fill="hold" grpId="0" nodeType="clickEffect">
+                                  <p:stCondLst>
+                                    <p:cond delay="0"/>
+                                  </p:stCondLst>
+                                  <p:childTnLst>
+                                    <p:set>
+                                      <p:cBhvr>
+                                        <p:cTn id="10" dur="1" fill="hold">
+                                          <p:stCondLst>
+                                            <p:cond delay="0"/>
+                                          </p:stCondLst>
+                                        </p:cTn>
+                                        <p:tgtEl>
+                                          <p:spTgt spid="3">
+                                            <p:txEl>
+                                              <p:pRg st="1" end="1"/>
+                                            </p:txEl>
+                                          </p:spTgt>
+                                        </p:tgtEl>
+                                        <p:attrNameLst>
+                                          <p:attrName>style.visibility</p:attrName>
+                                        </p:attrNameLst>
+                                      </p:cBhvr>
+                                      <p:to>
+                                        <p:strVal val="visible"/>
+                                      </p:to>
+                                    </p:set>
+                                  </p:childTnLst>
+                                </p:cTn>
+                              </p:par>
+                            </p:childTnLst>
+                          </p:cTn>
+                        </p:par>
+                      </p:childTnLst>
+                    </p:cTn>
+                  </p:par>
+                  <p:par>
+                    <p:cTn id="11" fill="hold">
+                      <p:stCondLst>
+                        <p:cond delay="indefinite"/>
+                      </p:stCondLst>
+                      <p:childTnLst>
+                        <p:par>
+                          <p:cTn id="12" fill="hold">
+                            <p:stCondLst>
+                              <p:cond delay="0"/>
+                            </p:stCondLst>
+                            <p:childTnLst>
+                              <p:par>
+                                <p:cTn id="13" presetID="1" presetClass="entr" presetSubtype="0" fill="hold" grpId="0" nodeType="clickEffect">
+                                  <p:stCondLst>
+                                    <p:cond delay="0"/>
+                                  </p:stCondLst>
+                                  <p:childTnLst>
+                                    <p:set>
+                                      <p:cBhvr>
+                                        <p:cTn id="14" dur="1" fill="hold">
+                                          <p:stCondLst>
+                                            <p:cond delay="0"/>
+                                          </p:stCondLst>
+                                        </p:cTn>
+                                        <p:tgtEl>
+                                          <p:spTgt spid="3">
+                                            <p:txEl>
+                                              <p:pRg st="2" end="2"/>
+                                            </p:txEl>
+                                          </p:spTgt>
+                                        </p:tgtEl>
+                                        <p:attrNameLst>
+                                          <p:attrName>style.visibility</p:attrName>
+                                        </p:attrNameLst>
+                                      </p:cBhvr>
+                                      <p:to>
+                                        <p:strVal val="visible"/>
+                                      </p:to>
+                                    </p:set>
+                                  </p:childTnLst>
+                                </p:cTn>
+                              </p:par>
+                            </p:childTnLst>
+                          </p:cTn>
+                        </p:par>
+                      </p:childTnLst>
+                    </p:cTn>
+                  </p:par>
+                </p:childTnLst>
+              </p:cTn>
+              <p:prevCondLst>
+                <p:cond evt="onPrev" delay="0">
+                  <p:tgtEl>
+                    <p:sldTgt/>
+                  </p:tgtEl>
+                </p:cond>
+              </p:prevCondLst>
+              <p:nextCondLst>
+                <p:cond evt="onNext" delay="0">
+                  <p:tgtEl>
+                    <p:sldTgt/>
+                  </p:tgtEl>
+                </p:cond>
+              </p:nextCondLst>
+            </p:seq>
+          </p:childTnLst>
+        </p:cTn>
+      </p:par>
+    </p:tnLst>
+    <p:bldLst>
+      <p:bldP spid="3" grpId="0" build="p"/>
+    </p:bldLst>
+  </p:timing>
+</p:sld>
+</file>
+
+<file path=ppt/slides/slide8.xml><?xml version="1.0" encoding="utf-8"?>
+<p:sld xmlns:a="http://schemas.openxmlformats.org/drawingml/2006/main" xmlns:r="http://schemas.openxmlformats.org/officeDocument/2006/relationships" xmlns:p="http://schemas.openxmlformats.org/presentationml/2006/main" showMasterPhAnim="0">
+  <p:cSld>
+    <p:spTree>
+      <p:nvGrpSpPr>
+        <p:cNvPr id="1" name=""/>
+        <p:cNvGrpSpPr/>
+        <p:nvPr/>
+      </p:nvGrpSpPr>
+      <p:grpSpPr>
+        <a:xfrm>
+          <a:off x="0" y="0"/>
+          <a:ext cx="0" cy="0"/>
+          <a:chOff x="0" y="0"/>
+          <a:chExt cx="0" cy="0"/>
+        </a:xfrm>
+      </p:grpSpPr>
+      <p:sp>
+        <p:nvSpPr>
+          <p:cNvPr id="287746" name="Rectangle 2"/>
+          <p:cNvSpPr>
+            <a:spLocks noGrp="1" noChangeArrowheads="1"/>
+          </p:cNvSpPr>
+          <p:nvPr>
+            <p:ph type="title"/>
+          </p:nvPr>
+        </p:nvSpPr>
+        <p:spPr/>
+        <p:txBody>
+          <a:bodyPr/>
+          <a:lstStyle/>
+          <a:p>
+            <a:r>
+              <a:rPr lang="en-US" dirty="0"/>
+              <a:t>GLM Assumptions (a reminder…)</a:t>
+            </a:r>
+          </a:p>
+        </p:txBody>
+      </p:sp>
+      <p:sp>
+        <p:nvSpPr>
+          <p:cNvPr id="287747" name="Rectangle 3"/>
+          <p:cNvSpPr>
+            <a:spLocks noGrp="1" noChangeArrowheads="1"/>
+          </p:cNvSpPr>
+          <p:nvPr>
+            <p:ph idx="1"/>
+          </p:nvPr>
+        </p:nvSpPr>
+        <p:spPr>
+          <a:xfrm>
+            <a:off x="838200" y="1690688"/>
+            <a:ext cx="10515600" cy="4351338"/>
+          </a:xfrm>
+        </p:spPr>
+        <p:txBody>
+          <a:bodyPr>
+            <a:normAutofit/>
+          </a:bodyPr>
+          <a:lstStyle/>
+          <a:p>
+            <a:pPr>
+              <a:lnSpc>
+                <a:spcPct val="90000"/>
+              </a:lnSpc>
+            </a:pPr>
+            <a:r>
+              <a:rPr lang="en-US" sz="2800" dirty="0"/>
+              <a:t>Additivity and linearity</a:t>
+            </a:r>
+          </a:p>
+          <a:p>
+            <a:r>
+              <a:rPr lang="en-US" dirty="0"/>
+              <a:t>Homoscedasticity (homogeneity of variance): For each value of the predictors the variance of the error term should be constant</a:t>
+            </a:r>
+          </a:p>
+          <a:p>
+            <a:r>
+              <a:rPr lang="en-US" dirty="0"/>
+              <a:t>Independent </a:t>
+            </a:r>
+            <a:r>
+              <a:rPr lang="en-GB" dirty="0"/>
+              <a:t>residuals</a:t>
+            </a:r>
+            <a:r>
+              <a:rPr lang="en-US" dirty="0"/>
+              <a:t>: the error terms should be unrelated.</a:t>
+            </a:r>
+          </a:p>
+          <a:p>
+            <a:pPr>
+              <a:lnSpc>
+                <a:spcPct val="90000"/>
+              </a:lnSpc>
+            </a:pPr>
+            <a:r>
+              <a:rPr lang="en-US" sz="2800" dirty="0"/>
+              <a:t>Normally-distributed residuals</a:t>
+            </a:r>
+          </a:p>
+        </p:txBody>
+      </p:sp>
+    </p:spTree>
+    <p:extLst>
+      <p:ext uri="{BB962C8B-B14F-4D97-AF65-F5344CB8AC3E}">
+        <p14:creationId xmlns:p14="http://schemas.microsoft.com/office/powerpoint/2010/main" val="825957965"/>
+      </p:ext>
+    </p:extLst>
+  </p:cSld>
+  <p:clrMapOvr>
+    <a:masterClrMapping/>
+  </p:clrMapOvr>
+  <p:timing>
+    <p:tnLst>
+      <p:par>
+        <p:cTn id="1" dur="indefinite" restart="never" nodeType="tmRoot">
+          <p:childTnLst>
+            <p:seq concurrent="1" nextAc="seek">
+              <p:cTn id="2" dur="indefinite" nodeType="mainSeq">
+                <p:childTnLst>
+                  <p:par>
+                    <p:cTn id="3" fill="hold">
+                      <p:stCondLst>
+                        <p:cond delay="indefinite"/>
+                      </p:stCondLst>
+                      <p:childTnLst>
+                        <p:par>
+                          <p:cTn id="4" fill="hold">
+                            <p:stCondLst>
+                              <p:cond delay="0"/>
+                            </p:stCondLst>
+                            <p:childTnLst>
+                              <p:par>
+                                <p:cTn id="5" presetID="1" presetClass="entr" presetSubtype="0" fill="hold" grpId="0" nodeType="clickEffect">
+                                  <p:stCondLst>
+                                    <p:cond delay="0"/>
+                                  </p:stCondLst>
+                                  <p:childTnLst>
+                                    <p:set>
+                                      <p:cBhvr>
+                                        <p:cTn id="6" dur="1" fill="hold">
+                                          <p:stCondLst>
+                                            <p:cond delay="0"/>
+                                          </p:stCondLst>
+                                        </p:cTn>
+                                        <p:tgtEl>
+                                          <p:spTgt spid="287747">
+                                            <p:txEl>
+                                              <p:pRg st="0" end="0"/>
+                                            </p:txEl>
+                                          </p:spTgt>
+                                        </p:tgtEl>
+                                        <p:attrNameLst>
+                                          <p:attrName>style.visibility</p:attrName>
+                                        </p:attrNameLst>
+                                      </p:cBhvr>
+                                      <p:to>
+                                        <p:strVal val="visible"/>
+                                      </p:to>
+                                    </p:set>
+                                  </p:childTnLst>
+                                </p:cTn>
+                              </p:par>
+                            </p:childTnLst>
+                          </p:cTn>
+                        </p:par>
+                      </p:childTnLst>
+                    </p:cTn>
+                  </p:par>
+                  <p:par>
+                    <p:cTn id="7" fill="hold">
+                      <p:stCondLst>
+                        <p:cond delay="indefinite"/>
+                      </p:stCondLst>
+                      <p:childTnLst>
+                        <p:par>
+                          <p:cTn id="8" fill="hold">
+                            <p:stCondLst>
+                              <p:cond delay="0"/>
+                            </p:stCondLst>
+                            <p:childTnLst>
+                              <p:par>
+                                <p:cTn id="9" presetID="1" presetClass="entr" presetSubtype="0" fill="hold" grpId="0" nodeType="clickEffect">
+                                  <p:stCondLst>
+                                    <p:cond delay="0"/>
+                                  </p:stCondLst>
+                                  <p:childTnLst>
+                                    <p:set>
+                                      <p:cBhvr>
+                                        <p:cTn id="10" dur="1" fill="hold">
+                                          <p:stCondLst>
+                                            <p:cond delay="0"/>
+                                          </p:stCondLst>
+                                        </p:cTn>
+                                        <p:tgtEl>
+                                          <p:spTgt spid="287747">
+                                            <p:txEl>
+                                              <p:pRg st="1" end="1"/>
+                                            </p:txEl>
+                                          </p:spTgt>
+                                        </p:tgtEl>
+                                        <p:attrNameLst>
+                                          <p:attrName>style.visibility</p:attrName>
+                                        </p:attrNameLst>
+                                      </p:cBhvr>
+                                      <p:to>
+                                        <p:strVal val="visible"/>
+                                      </p:to>
+                                    </p:set>
+                                  </p:childTnLst>
+                                </p:cTn>
+                              </p:par>
+                            </p:childTnLst>
+                          </p:cTn>
+                        </p:par>
+                      </p:childTnLst>
+                    </p:cTn>
+                  </p:par>
+                  <p:par>
+                    <p:cTn id="11" fill="hold">
+                      <p:stCondLst>
+                        <p:cond delay="indefinite"/>
+                      </p:stCondLst>
+                      <p:childTnLst>
+                        <p:par>
+                          <p:cTn id="12" fill="hold">
+                            <p:stCondLst>
+                              <p:cond delay="0"/>
+                            </p:stCondLst>
+                            <p:childTnLst>
+                              <p:par>
+                                <p:cTn id="13" presetID="1" presetClass="entr" presetSubtype="0" fill="hold" grpId="0" nodeType="clickEffect">
+                                  <p:stCondLst>
+                                    <p:cond delay="0"/>
+                                  </p:stCondLst>
+                                  <p:childTnLst>
+                                    <p:set>
+                                      <p:cBhvr>
+                                        <p:cTn id="14" dur="1" fill="hold">
+                                          <p:stCondLst>
+                                            <p:cond delay="0"/>
+                                          </p:stCondLst>
+                                        </p:cTn>
+                                        <p:tgtEl>
+                                          <p:spTgt spid="287747">
+                                            <p:txEl>
+                                              <p:pRg st="2" end="2"/>
+                                            </p:txEl>
+                                          </p:spTgt>
+                                        </p:tgtEl>
+                                        <p:attrNameLst>
+                                          <p:attrName>style.visibility</p:attrName>
+                                        </p:attrNameLst>
+                                      </p:cBhvr>
+                                      <p:to>
+                                        <p:strVal val="visible"/>
+                                      </p:to>
+                                    </p:set>
+                                  </p:childTnLst>
+                                </p:cTn>
+                              </p:par>
+                            </p:childTnLst>
+                          </p:cTn>
+                        </p:par>
+                      </p:childTnLst>
+                    </p:cTn>
+                  </p:par>
+                  <p:par>
+                    <p:cTn id="15" fill="hold">
+                      <p:stCondLst>
+                        <p:cond delay="indefinite"/>
+                      </p:stCondLst>
+                      <p:childTnLst>
+                        <p:par>
+                          <p:cTn id="16" fill="hold">
+                            <p:stCondLst>
+                              <p:cond delay="0"/>
+                            </p:stCondLst>
+                            <p:childTnLst>
+                              <p:par>
+                                <p:cTn id="17" presetID="1" presetClass="entr" presetSubtype="0" fill="hold" grpId="0" nodeType="clickEffect">
+                                  <p:stCondLst>
+                                    <p:cond delay="0"/>
+                                  </p:stCondLst>
+                                  <p:childTnLst>
+                                    <p:set>
+                                      <p:cBhvr>
+                                        <p:cTn id="18" dur="1" fill="hold">
+                                          <p:stCondLst>
+                                            <p:cond delay="0"/>
+                                          </p:stCondLst>
+                                        </p:cTn>
+                                        <p:tgtEl>
+                                          <p:spTgt spid="287747">
+                                            <p:txEl>
+                                              <p:pRg st="3" end="3"/>
+                                            </p:txEl>
+                                          </p:spTgt>
+                                        </p:tgtEl>
+                                        <p:attrNameLst>
+                                          <p:attrName>style.visibility</p:attrName>
+                                        </p:attrNameLst>
+                                      </p:cBhvr>
+                                      <p:to>
+                                        <p:strVal val="visible"/>
+                                      </p:to>
+                                    </p:set>
+                                  </p:childTnLst>
+                                </p:cTn>
+                              </p:par>
+                            </p:childTnLst>
+                          </p:cTn>
+                        </p:par>
+                      </p:childTnLst>
+                    </p:cTn>
+                  </p:par>
+                </p:childTnLst>
+              </p:cTn>
+              <p:prevCondLst>
+                <p:cond evt="onPrev" delay="0">
+                  <p:tgtEl>
+                    <p:sldTgt/>
+                  </p:tgtEl>
+                </p:cond>
+              </p:prevCondLst>
+              <p:nextCondLst>
+                <p:cond evt="onNext" delay="0">
+                  <p:tgtEl>
+                    <p:sldTgt/>
+                  </p:tgtEl>
+                </p:cond>
+              </p:nextCondLst>
+            </p:seq>
+          </p:childTnLst>
+        </p:cTn>
+      </p:par>
+    </p:tnLst>
+    <p:bldLst>
+      <p:bldP spid="287747" grpId="0" build="p"/>
+    </p:bldLst>
+  </p:timing>
+</p:sld>
+</file>
+
+<file path=ppt/slides/slide9.xml><?xml version="1.0" encoding="utf-8"?>
+<p:sld xmlns:a="http://schemas.openxmlformats.org/drawingml/2006/main" xmlns:r="http://schemas.openxmlformats.org/officeDocument/2006/relationships" xmlns:p="http://schemas.openxmlformats.org/presentationml/2006/main">
+  <p:cSld>
+    <p:spTree>
+      <p:nvGrpSpPr>
+        <p:cNvPr id="1" name="">
+          <a:extLst>
+            <a:ext uri="{FF2B5EF4-FFF2-40B4-BE49-F238E27FC236}">
+              <a16:creationId xmlns:a16="http://schemas.microsoft.com/office/drawing/2014/main" id="{E02DE8A6-30CE-BA6E-DB69-EB1134B82E1A}"/>
+            </a:ext>
+          </a:extLst>
+        </p:cNvPr>
+        <p:cNvGrpSpPr/>
+        <p:nvPr/>
+      </p:nvGrpSpPr>
+      <p:grpSpPr>
+        <a:xfrm>
+          <a:off x="0" y="0"/>
+          <a:ext cx="0" cy="0"/>
+          <a:chOff x="0" y="0"/>
+          <a:chExt cx="0" cy="0"/>
+        </a:xfrm>
+      </p:grpSpPr>
+      <p:sp>
+        <p:nvSpPr>
+          <p:cNvPr id="2" name="Title 1">
+            <a:extLst>
+              <a:ext uri="{FF2B5EF4-FFF2-40B4-BE49-F238E27FC236}">
+                <a16:creationId xmlns:a16="http://schemas.microsoft.com/office/drawing/2014/main" id="{CE207E46-E1D0-C2C1-423E-7DC051733A78}"/>
+              </a:ext>
+            </a:extLst>
+          </p:cNvPr>
+          <p:cNvSpPr>
+            <a:spLocks noGrp="1"/>
+          </p:cNvSpPr>
+          <p:nvPr>
+            <p:ph type="title"/>
+          </p:nvPr>
+        </p:nvSpPr>
+        <p:spPr>
+          <a:xfrm>
+            <a:off x="838200" y="0"/>
+            <a:ext cx="10515600" cy="1325563"/>
+          </a:xfrm>
+        </p:spPr>
+        <p:txBody>
+          <a:bodyPr/>
+          <a:lstStyle/>
+          <a:p>
+            <a:r>
+              <a:rPr lang="en-GB" dirty="0"/>
+              <a:t>GLM Assumptions applied to the </a:t>
+            </a:r>
+            <a:r>
+              <a:rPr lang="en-GB" i="1" dirty="0"/>
+              <a:t>t</a:t>
+            </a:r>
+            <a:r>
+              <a:rPr lang="en-GB" dirty="0"/>
+              <a:t>-test</a:t>
+            </a:r>
+          </a:p>
+        </p:txBody>
+      </p:sp>
+      <p:sp>
+        <p:nvSpPr>
+          <p:cNvPr id="3" name="Content Placeholder 2">
+            <a:extLst>
+              <a:ext uri="{FF2B5EF4-FFF2-40B4-BE49-F238E27FC236}">
+                <a16:creationId xmlns:a16="http://schemas.microsoft.com/office/drawing/2014/main" id="{8DC902E5-C945-7217-C827-839511DC939D}"/>
+              </a:ext>
+            </a:extLst>
+          </p:cNvPr>
+          <p:cNvSpPr>
+            <a:spLocks noGrp="1"/>
+          </p:cNvSpPr>
+          <p:nvPr>
+            <p:ph idx="1"/>
+          </p:nvPr>
+        </p:nvSpPr>
+        <p:spPr>
+          <a:xfrm>
+            <a:off x="449451" y="1183627"/>
+            <a:ext cx="11422251" cy="4860712"/>
+          </a:xfrm>
+        </p:spPr>
+        <p:txBody>
+          <a:bodyPr>
+            <a:noAutofit/>
+          </a:bodyPr>
+          <a:lstStyle/>
+          <a:p>
+            <a:r>
+              <a:rPr lang="en-US" sz="2400" dirty="0"/>
+              <a:t>Additivity and linearity – only one predictor (IV group) and 2 levels so these are always satisfied </a:t>
+            </a:r>
+          </a:p>
+          <a:p>
+            <a:r>
+              <a:rPr lang="en-US" sz="2400" dirty="0"/>
+              <a:t>Homogeneity of variance </a:t>
+            </a:r>
+          </a:p>
+          <a:p>
+            <a:pPr lvl="1"/>
+            <a:r>
+              <a:rPr lang="en-US" sz="2000" dirty="0"/>
+              <a:t>Independent samples t-test: Variance at each level of the IV should be equal</a:t>
+            </a:r>
+          </a:p>
+          <a:p>
+            <a:pPr lvl="1"/>
+            <a:r>
+              <a:rPr lang="en-US" sz="2000" dirty="0"/>
+              <a:t>Dependent samples t-test: always satisfied because we are concerned with variance of the difference between IV levels</a:t>
+            </a:r>
+          </a:p>
+          <a:p>
+            <a:r>
+              <a:rPr lang="en-US" sz="2400" dirty="0"/>
+              <a:t>Independent </a:t>
+            </a:r>
+            <a:r>
+              <a:rPr lang="en-GB" sz="2400" dirty="0"/>
+              <a:t>residuals</a:t>
+            </a:r>
+          </a:p>
+          <a:p>
+            <a:pPr lvl="1"/>
+            <a:r>
+              <a:rPr lang="en-US" sz="2000" dirty="0"/>
+              <a:t>Independent samples t-test: </a:t>
+            </a:r>
+            <a:r>
+              <a:rPr lang="en-GB" sz="2000" dirty="0"/>
+              <a:t>distances of each point from its group mean are unrelated</a:t>
+            </a:r>
+            <a:endParaRPr lang="en-US" sz="2000" dirty="0"/>
+          </a:p>
+          <a:p>
+            <a:pPr lvl="1"/>
+            <a:r>
+              <a:rPr lang="en-US" sz="2000" dirty="0"/>
+              <a:t>Dependent samples t-test: </a:t>
+            </a:r>
+            <a:r>
+              <a:rPr lang="en-GB" sz="2000" i="1" dirty="0"/>
+              <a:t>differences</a:t>
+            </a:r>
+            <a:r>
+              <a:rPr lang="en-GB" sz="2000" dirty="0"/>
+              <a:t> between levels for each point are unrelated</a:t>
+            </a:r>
+          </a:p>
+          <a:p>
+            <a:r>
+              <a:rPr lang="en-GB" sz="2400" dirty="0"/>
+              <a:t>Normally distributed residuals </a:t>
             </a:r>
           </a:p>
           <a:p>
@@ -7011,8 +8443,8 @@
               </a:lnSpc>
             </a:pPr>
             <a:r>
-              <a:rPr lang="en-GB" sz="3000" dirty="0"/>
-              <a:t>The sampling distribution is normally distributed</a:t>
+              <a:rPr lang="en-GB" sz="2000" dirty="0"/>
+              <a:t>Independent samples: distances of each point from its group mean are normally distributed</a:t>
             </a:r>
           </a:p>
           <a:p>
@@ -7022,50 +8454,27 @@
               </a:lnSpc>
             </a:pPr>
             <a:r>
-              <a:rPr lang="en-GB" sz="3000" dirty="0"/>
-              <a:t>In the dependent </a:t>
-            </a:r>
-            <a:r>
-              <a:rPr lang="en-GB" sz="3000" i="1" dirty="0"/>
-              <a:t>t­</a:t>
-            </a:r>
-            <a:r>
-              <a:rPr lang="en-GB" sz="3000" dirty="0"/>
-              <a:t>-test this means that the sampling distribution of the </a:t>
-            </a:r>
-            <a:r>
-              <a:rPr lang="en-GB" sz="3000" i="1" dirty="0"/>
+              <a:rPr lang="en-GB" sz="2000" dirty="0"/>
+              <a:t>Dependent samples: </a:t>
+            </a:r>
+            <a:r>
+              <a:rPr lang="en-GB" sz="2000" i="1" dirty="0"/>
               <a:t>differences</a:t>
             </a:r>
             <a:r>
-              <a:rPr lang="en-GB" sz="3000" dirty="0"/>
-              <a:t> between scores should be normal, not the scores themselves</a:t>
-            </a:r>
-          </a:p>
-          <a:p>
-            <a:pPr lvl="1">
-              <a:lnSpc>
-                <a:spcPct val="100000"/>
-              </a:lnSpc>
-            </a:pPr>
-            <a:r>
-              <a:rPr lang="en-GB" sz="3000" dirty="0"/>
-              <a:t>The outcome is measured at least at the interval level. For ordinal data, see “Non-parametric tests”</a:t>
-            </a:r>
-          </a:p>
-          <a:p>
-            <a:pPr lvl="1"/>
-            <a:endParaRPr lang="en-GB" sz="3000" dirty="0"/>
-          </a:p>
-          <a:p>
-            <a:endParaRPr lang="en-GB" sz="3400" dirty="0"/>
+              <a:rPr lang="en-GB" sz="2000" dirty="0"/>
+              <a:t> between levels for each point are normally distributed</a:t>
+            </a:r>
+          </a:p>
+          <a:p>
+            <a:endParaRPr lang="en-GB" sz="2400" dirty="0"/>
           </a:p>
         </p:txBody>
       </p:sp>
     </p:spTree>
     <p:extLst>
       <p:ext uri="{BB962C8B-B14F-4D97-AF65-F5344CB8AC3E}">
-        <p14:creationId xmlns:p14="http://schemas.microsoft.com/office/powerpoint/2010/main" val="4241242777"/>
+        <p14:creationId xmlns:p14="http://schemas.microsoft.com/office/powerpoint/2010/main" val="313174204"/>
       </p:ext>
     </p:extLst>
   </p:cSld>
@@ -7234,15 +8643,33 @@
                                   </p:childTnLst>
                                 </p:cTn>
                               </p:par>
+                            </p:childTnLst>
+                          </p:cTn>
+                        </p:par>
+                      </p:childTnLst>
+                    </p:cTn>
+                  </p:par>
+                  <p:par>
+                    <p:cTn id="15" fill="hold">
+                      <p:stCondLst>
+                        <p:cond delay="indefinite"/>
+                      </p:stCondLst>
+                      <p:childTnLst>
+                        <p:par>
+                          <p:cTn id="16" fill="hold">
+                            <p:stCondLst>
+                              <p:cond delay="0"/>
+                            </p:stCondLst>
+                            <p:childTnLst>
                               <p:par>
-                                <p:cTn id="15" presetID="1" presetClass="entr" presetSubtype="0" fill="hold" grpId="0" nodeType="withEffect">
+                                <p:cTn id="17" presetID="1" presetClass="entr" presetSubtype="0" fill="hold" grpId="0" nodeType="clickEffect">
                                   <p:stCondLst>
                                     <p:cond delay="0"/>
                                   </p:stCondLst>
                                   <p:childTnLst>
                                     <p:set>
                                       <p:cBhvr>
-                                        <p:cTn id="16" dur="1" fill="hold">
+                                        <p:cTn id="18" dur="1" fill="hold">
                                           <p:stCondLst>
                                             <p:cond delay="0"/>
                                           </p:stCondLst>
@@ -7265,192 +8692,15 @@
                                   </p:childTnLst>
                                 </p:cTn>
                               </p:par>
-                            </p:childTnLst>
-                          </p:cTn>
-                        </p:par>
-                      </p:childTnLst>
-                    </p:cTn>
-                  </p:par>
-                </p:childTnLst>
-              </p:cTn>
-              <p:prevCondLst>
-                <p:cond evt="onPrev" delay="0">
-                  <p:tgtEl>
-                    <p:sldTgt/>
-                  </p:tgtEl>
-                </p:cond>
-              </p:prevCondLst>
-              <p:nextCondLst>
-                <p:cond evt="onNext" delay="0">
-                  <p:tgtEl>
-                    <p:sldTgt/>
-                  </p:tgtEl>
-                </p:cond>
-              </p:nextCondLst>
-            </p:seq>
-          </p:childTnLst>
-        </p:cTn>
-      </p:par>
-    </p:tnLst>
-    <p:bldLst>
-      <p:bldP spid="3" grpId="0" build="p"/>
-    </p:bldLst>
-  </p:timing>
-</p:sld>
-</file>
-
-<file path=ppt/slides/slide8.xml><?xml version="1.0" encoding="utf-8"?>
-<p:sld xmlns:a="http://schemas.openxmlformats.org/drawingml/2006/main" xmlns:r="http://schemas.openxmlformats.org/officeDocument/2006/relationships" xmlns:p="http://schemas.openxmlformats.org/presentationml/2006/main">
-  <p:cSld>
-    <p:spTree>
-      <p:nvGrpSpPr>
-        <p:cNvPr id="1" name=""/>
-        <p:cNvGrpSpPr/>
-        <p:nvPr/>
-      </p:nvGrpSpPr>
-      <p:grpSpPr>
-        <a:xfrm>
-          <a:off x="0" y="0"/>
-          <a:ext cx="0" cy="0"/>
-          <a:chOff x="0" y="0"/>
-          <a:chExt cx="0" cy="0"/>
-        </a:xfrm>
-      </p:grpSpPr>
-      <p:sp>
-        <p:nvSpPr>
-          <p:cNvPr id="2" name="Title 1"/>
-          <p:cNvSpPr>
-            <a:spLocks noGrp="1"/>
-          </p:cNvSpPr>
-          <p:nvPr>
-            <p:ph type="title"/>
-          </p:nvPr>
-        </p:nvSpPr>
-        <p:spPr/>
-        <p:txBody>
-          <a:bodyPr/>
-          <a:lstStyle/>
-          <a:p>
-            <a:r>
-              <a:rPr lang="en-GB" dirty="0"/>
-              <a:t>Assumptions of the </a:t>
-            </a:r>
-            <a:r>
-              <a:rPr lang="en-GB" i="1" dirty="0"/>
-              <a:t>t</a:t>
-            </a:r>
-            <a:r>
-              <a:rPr lang="en-GB" dirty="0"/>
-              <a:t>-test</a:t>
-            </a:r>
-          </a:p>
-        </p:txBody>
-      </p:sp>
-      <p:sp>
-        <p:nvSpPr>
-          <p:cNvPr id="3" name="Content Placeholder 2"/>
-          <p:cNvSpPr>
-            <a:spLocks noGrp="1"/>
-          </p:cNvSpPr>
-          <p:nvPr>
-            <p:ph idx="1"/>
-          </p:nvPr>
-        </p:nvSpPr>
-        <p:spPr>
-          <a:xfrm>
-            <a:off x="838200" y="1690688"/>
-            <a:ext cx="10515600" cy="4351338"/>
-          </a:xfrm>
-        </p:spPr>
-        <p:txBody>
-          <a:bodyPr>
-            <a:noAutofit/>
-          </a:bodyPr>
-          <a:lstStyle/>
-          <a:p>
-            <a:r>
-              <a:rPr lang="en-GB" sz="3200" dirty="0"/>
-              <a:t>The independent </a:t>
-            </a:r>
-            <a:r>
-              <a:rPr lang="en-GB" sz="3200" i="1" dirty="0"/>
-              <a:t>t</a:t>
-            </a:r>
-            <a:r>
-              <a:rPr lang="en-GB" sz="3200" dirty="0"/>
-              <a:t>-test, because it is used to test different groups of people, also assumes:</a:t>
-            </a:r>
-          </a:p>
-          <a:p>
-            <a:endParaRPr lang="en-GB" sz="3200" dirty="0"/>
-          </a:p>
-          <a:p>
-            <a:pPr lvl="1"/>
-            <a:r>
-              <a:rPr lang="en-GB" sz="3000" dirty="0"/>
-              <a:t>Variances in these populations are roughly equal (</a:t>
-            </a:r>
-            <a:r>
-              <a:rPr lang="en-GB" sz="3000" i="1" dirty="0"/>
-              <a:t>homogeneity of variance</a:t>
-            </a:r>
-            <a:r>
-              <a:rPr lang="en-GB" sz="3000" dirty="0"/>
-              <a:t>).</a:t>
-            </a:r>
-          </a:p>
-          <a:p>
-            <a:pPr lvl="1"/>
-            <a:endParaRPr lang="en-GB" sz="3000" dirty="0"/>
-          </a:p>
-          <a:p>
-            <a:pPr lvl="1"/>
-            <a:r>
-              <a:rPr lang="en-GB" sz="3000" dirty="0"/>
-              <a:t>Scores in different treatment conditions are independent (because they come from different people).</a:t>
-            </a:r>
-          </a:p>
-        </p:txBody>
-      </p:sp>
-    </p:spTree>
-    <p:extLst>
-      <p:ext uri="{BB962C8B-B14F-4D97-AF65-F5344CB8AC3E}">
-        <p14:creationId xmlns:p14="http://schemas.microsoft.com/office/powerpoint/2010/main" val="2200256569"/>
-      </p:ext>
-    </p:extLst>
-  </p:cSld>
-  <p:clrMapOvr>
-    <a:masterClrMapping/>
-  </p:clrMapOvr>
-  <p:timing>
-    <p:tnLst>
-      <p:par>
-        <p:cTn id="1" dur="indefinite" restart="never" nodeType="tmRoot">
-          <p:childTnLst>
-            <p:seq concurrent="1" nextAc="seek">
-              <p:cTn id="2" dur="indefinite" nodeType="mainSeq">
-                <p:childTnLst>
-                  <p:par>
-                    <p:cTn id="3" fill="hold">
-                      <p:stCondLst>
-                        <p:cond delay="indefinite"/>
-                      </p:stCondLst>
-                      <p:childTnLst>
-                        <p:par>
-                          <p:cTn id="4" fill="hold">
-                            <p:stCondLst>
-                              <p:cond delay="0"/>
-                            </p:stCondLst>
-                            <p:childTnLst>
                               <p:par>
-                                <p:cTn id="5" presetID="1" presetClass="entr" presetSubtype="0" fill="hold" grpId="0" nodeType="clickEffect">
+                                <p:cTn id="19" presetID="1" presetClass="entr" presetSubtype="0" fill="hold" grpId="0" nodeType="withEffect">
                                   <p:stCondLst>
                                     <p:cond delay="0"/>
                                   </p:stCondLst>
                                   <p:childTnLst>
                                     <p:set>
                                       <p:cBhvr>
-                                        <p:cTn id="6" dur="1" fill="hold">
+                                        <p:cTn id="20" dur="1" fill="hold">
                                           <p:stCondLst>
                                             <p:cond delay="0"/>
                                           </p:stCondLst>
@@ -7458,7 +8708,38 @@
                                         <p:tgtEl>
                                           <p:spTgt spid="3">
                                             <p:txEl>
-                                              <p:pRg st="0" end="0"/>
+                                              <p:pRg st="5" end="5"/>
+                                            </p:txEl>
+                                          </p:spTgt>
+                                        </p:tgtEl>
+                                        <p:attrNameLst>
+                                          <p:attrName>style.visibility</p:attrName>
+                                        </p:attrNameLst>
+                                      </p:cBhvr>
+                                      <p:to>
+                                        <p:strVal val="visible"/>
+                                      </p:to>
+                                    </p:set>
+                                  </p:childTnLst>
+                                </p:cTn>
+                              </p:par>
+                              <p:par>
+                                <p:cTn id="21" presetID="1" presetClass="entr" presetSubtype="0" fill="hold" grpId="0" nodeType="withEffect">
+                                  <p:stCondLst>
+                                    <p:cond delay="0"/>
+                                  </p:stCondLst>
+                                  <p:childTnLst>
+                                    <p:set>
+                                      <p:cBhvr>
+                                        <p:cTn id="22" dur="1" fill="hold">
+                                          <p:stCondLst>
+                                            <p:cond delay="0"/>
+                                          </p:stCondLst>
+                                        </p:cTn>
+                                        <p:tgtEl>
+                                          <p:spTgt spid="3">
+                                            <p:txEl>
+                                              <p:pRg st="6" end="6"/>
                                             </p:txEl>
                                           </p:spTgt>
                                         </p:tgtEl>
@@ -7480,26 +8761,26 @@
                     </p:cTn>
                   </p:par>
                   <p:par>
-                    <p:cTn id="7" fill="hold">
+                    <p:cTn id="23" fill="hold">
                       <p:stCondLst>
                         <p:cond delay="indefinite"/>
                       </p:stCondLst>
                       <p:childTnLst>
                         <p:par>
-                          <p:cTn id="8" fill="hold">
+                          <p:cTn id="24" fill="hold">
                             <p:stCondLst>
                               <p:cond delay="0"/>
                             </p:stCondLst>
                             <p:childTnLst>
                               <p:par>
-                                <p:cTn id="9" presetID="1" presetClass="entr" presetSubtype="0" fill="hold" grpId="0" nodeType="clickEffect">
+                                <p:cTn id="25" presetID="1" presetClass="entr" presetSubtype="0" fill="hold" grpId="0" nodeType="clickEffect">
                                   <p:stCondLst>
                                     <p:cond delay="0"/>
                                   </p:stCondLst>
                                   <p:childTnLst>
                                     <p:set>
                                       <p:cBhvr>
-                                        <p:cTn id="10" dur="1" fill="hold">
+                                        <p:cTn id="26" dur="1" fill="hold">
                                           <p:stCondLst>
                                             <p:cond delay="0"/>
                                           </p:stCondLst>
@@ -7507,251 +8788,7 @@
                                         <p:tgtEl>
                                           <p:spTgt spid="3">
                                             <p:txEl>
-                                              <p:pRg st="2" end="2"/>
-                                            </p:txEl>
-                                          </p:spTgt>
-                                        </p:tgtEl>
-                                        <p:attrNameLst>
-                                          <p:attrName>style.visibility</p:attrName>
-                                        </p:attrNameLst>
-                                      </p:cBhvr>
-                                      <p:to>
-                                        <p:strVal val="visible"/>
-                                      </p:to>
-                                    </p:set>
-                                  </p:childTnLst>
-                                </p:cTn>
-                              </p:par>
-                            </p:childTnLst>
-                          </p:cTn>
-                        </p:par>
-                      </p:childTnLst>
-                    </p:cTn>
-                  </p:par>
-                  <p:par>
-                    <p:cTn id="11" fill="hold">
-                      <p:stCondLst>
-                        <p:cond delay="indefinite"/>
-                      </p:stCondLst>
-                      <p:childTnLst>
-                        <p:par>
-                          <p:cTn id="12" fill="hold">
-                            <p:stCondLst>
-                              <p:cond delay="0"/>
-                            </p:stCondLst>
-                            <p:childTnLst>
-                              <p:par>
-                                <p:cTn id="13" presetID="1" presetClass="entr" presetSubtype="0" fill="hold" grpId="0" nodeType="clickEffect">
-                                  <p:stCondLst>
-                                    <p:cond delay="0"/>
-                                  </p:stCondLst>
-                                  <p:childTnLst>
-                                    <p:set>
-                                      <p:cBhvr>
-                                        <p:cTn id="14" dur="1" fill="hold">
-                                          <p:stCondLst>
-                                            <p:cond delay="0"/>
-                                          </p:stCondLst>
-                                        </p:cTn>
-                                        <p:tgtEl>
-                                          <p:spTgt spid="3">
-                                            <p:txEl>
-                                              <p:pRg st="4" end="4"/>
-                                            </p:txEl>
-                                          </p:spTgt>
-                                        </p:tgtEl>
-                                        <p:attrNameLst>
-                                          <p:attrName>style.visibility</p:attrName>
-                                        </p:attrNameLst>
-                                      </p:cBhvr>
-                                      <p:to>
-                                        <p:strVal val="visible"/>
-                                      </p:to>
-                                    </p:set>
-                                  </p:childTnLst>
-                                </p:cTn>
-                              </p:par>
-                            </p:childTnLst>
-                          </p:cTn>
-                        </p:par>
-                      </p:childTnLst>
-                    </p:cTn>
-                  </p:par>
-                </p:childTnLst>
-              </p:cTn>
-              <p:prevCondLst>
-                <p:cond evt="onPrev" delay="0">
-                  <p:tgtEl>
-                    <p:sldTgt/>
-                  </p:tgtEl>
-                </p:cond>
-              </p:prevCondLst>
-              <p:nextCondLst>
-                <p:cond evt="onNext" delay="0">
-                  <p:tgtEl>
-                    <p:sldTgt/>
-                  </p:tgtEl>
-                </p:cond>
-              </p:nextCondLst>
-            </p:seq>
-          </p:childTnLst>
-        </p:cTn>
-      </p:par>
-    </p:tnLst>
-    <p:bldLst>
-      <p:bldP spid="3" grpId="0" uiExpand="1" build="p"/>
-    </p:bldLst>
-  </p:timing>
-</p:sld>
-</file>
-
-<file path=ppt/slides/slide9.xml><?xml version="1.0" encoding="utf-8"?>
-<p:sld xmlns:a="http://schemas.openxmlformats.org/drawingml/2006/main" xmlns:r="http://schemas.openxmlformats.org/officeDocument/2006/relationships" xmlns:p="http://schemas.openxmlformats.org/presentationml/2006/main">
-  <p:cSld>
-    <p:spTree>
-      <p:nvGrpSpPr>
-        <p:cNvPr id="1" name=""/>
-        <p:cNvGrpSpPr/>
-        <p:nvPr/>
-      </p:nvGrpSpPr>
-      <p:grpSpPr>
-        <a:xfrm>
-          <a:off x="0" y="0"/>
-          <a:ext cx="0" cy="0"/>
-          <a:chOff x="0" y="0"/>
-          <a:chExt cx="0" cy="0"/>
-        </a:xfrm>
-      </p:grpSpPr>
-      <p:sp>
-        <p:nvSpPr>
-          <p:cNvPr id="2" name="Title 1"/>
-          <p:cNvSpPr>
-            <a:spLocks noGrp="1"/>
-          </p:cNvSpPr>
-          <p:nvPr>
-            <p:ph type="title"/>
-          </p:nvPr>
-        </p:nvSpPr>
-        <p:spPr/>
-        <p:txBody>
-          <a:bodyPr/>
-          <a:lstStyle/>
-          <a:p>
-            <a:r>
-              <a:rPr lang="en-GB" dirty="0"/>
-              <a:t>Non-Parametric Tests</a:t>
-            </a:r>
-          </a:p>
-        </p:txBody>
-      </p:sp>
-      <p:sp>
-        <p:nvSpPr>
-          <p:cNvPr id="3" name="Content Placeholder 2"/>
-          <p:cNvSpPr>
-            <a:spLocks noGrp="1"/>
-          </p:cNvSpPr>
-          <p:nvPr>
-            <p:ph idx="1"/>
-          </p:nvPr>
-        </p:nvSpPr>
-        <p:spPr>
-          <a:xfrm>
-            <a:off x="838200" y="1586474"/>
-            <a:ext cx="10515600" cy="4351338"/>
-          </a:xfrm>
-        </p:spPr>
-        <p:txBody>
-          <a:bodyPr>
-            <a:normAutofit/>
-          </a:bodyPr>
-          <a:lstStyle/>
-          <a:p>
-            <a:r>
-              <a:rPr lang="en-GB" sz="3500" dirty="0"/>
-              <a:t>Mann-Whitney/Wilcoxon rank-sum Test</a:t>
-            </a:r>
-          </a:p>
-          <a:p>
-            <a:pPr lvl="1"/>
-            <a:r>
-              <a:rPr lang="en-GB" sz="3500" dirty="0"/>
-              <a:t>Compares two independent groups of scores</a:t>
-            </a:r>
-          </a:p>
-          <a:p>
-            <a:r>
-              <a:rPr lang="en-GB" sz="3500" dirty="0"/>
-              <a:t>Wilcoxon signed rank Test</a:t>
-            </a:r>
-          </a:p>
-          <a:p>
-            <a:pPr lvl="1"/>
-            <a:r>
-              <a:rPr lang="en-GB" sz="3500" dirty="0"/>
-              <a:t>Compares two dependent groups of scores</a:t>
-            </a:r>
-          </a:p>
-          <a:p>
-            <a:pPr marL="0" indent="0">
-              <a:buNone/>
-            </a:pPr>
-            <a:endParaRPr lang="en-GB" dirty="0"/>
-          </a:p>
-          <a:p>
-            <a:endParaRPr lang="en-GB" dirty="0"/>
-          </a:p>
-          <a:p>
-            <a:endParaRPr lang="en-GB" dirty="0"/>
-          </a:p>
-        </p:txBody>
-      </p:sp>
-    </p:spTree>
-    <p:extLst>
-      <p:ext uri="{BB962C8B-B14F-4D97-AF65-F5344CB8AC3E}">
-        <p14:creationId xmlns:p14="http://schemas.microsoft.com/office/powerpoint/2010/main" val="290789418"/>
-      </p:ext>
-    </p:extLst>
-  </p:cSld>
-  <p:clrMapOvr>
-    <a:masterClrMapping/>
-  </p:clrMapOvr>
-  <p:timing>
-    <p:tnLst>
-      <p:par>
-        <p:cTn id="1" dur="indefinite" restart="never" nodeType="tmRoot">
-          <p:childTnLst>
-            <p:seq concurrent="1" nextAc="seek">
-              <p:cTn id="2" dur="indefinite" nodeType="mainSeq">
-                <p:childTnLst>
-                  <p:par>
-                    <p:cTn id="3" fill="hold">
-                      <p:stCondLst>
-                        <p:cond delay="indefinite"/>
-                      </p:stCondLst>
-                      <p:childTnLst>
-                        <p:par>
-                          <p:cTn id="4" fill="hold">
-                            <p:stCondLst>
-                              <p:cond delay="0"/>
-                            </p:stCondLst>
-                            <p:childTnLst>
-                              <p:par>
-                                <p:cTn id="5" presetID="1" presetClass="entr" presetSubtype="0" fill="hold" grpId="0" nodeType="clickEffect">
-                                  <p:stCondLst>
-                                    <p:cond delay="0"/>
-                                  </p:stCondLst>
-                                  <p:childTnLst>
-                                    <p:set>
-                                      <p:cBhvr>
-                                        <p:cTn id="6" dur="1" fill="hold">
-                                          <p:stCondLst>
-                                            <p:cond delay="0"/>
-                                          </p:stCondLst>
-                                        </p:cTn>
-                                        <p:tgtEl>
-                                          <p:spTgt spid="3">
-                                            <p:txEl>
-                                              <p:pRg st="0" end="0"/>
+                                              <p:pRg st="7" end="7"/>
                                             </p:txEl>
                                           </p:spTgt>
                                         </p:tgtEl>
@@ -7767,14 +8804,14 @@
                                 </p:cTn>
                               </p:par>
                               <p:par>
-                                <p:cTn id="7" presetID="1" presetClass="entr" presetSubtype="0" fill="hold" grpId="0" nodeType="withEffect">
+                                <p:cTn id="27" presetID="1" presetClass="entr" presetSubtype="0" fill="hold" grpId="0" nodeType="withEffect">
                                   <p:stCondLst>
                                     <p:cond delay="0"/>
                                   </p:stCondLst>
                                   <p:childTnLst>
                                     <p:set>
                                       <p:cBhvr>
-                                        <p:cTn id="8" dur="1" fill="hold">
+                                        <p:cTn id="28" dur="1" fill="hold">
                                           <p:stCondLst>
                                             <p:cond delay="0"/>
                                           </p:stCondLst>
@@ -7782,56 +8819,7 @@
                                         <p:tgtEl>
                                           <p:spTgt spid="3">
                                             <p:txEl>
-                                              <p:pRg st="1" end="1"/>
-                                            </p:txEl>
-                                          </p:spTgt>
-                                        </p:tgtEl>
-                                        <p:attrNameLst>
-                                          <p:attrName>style.visibility</p:attrName>
-                                        </p:attrNameLst>
-                                      </p:cBhvr>
-                                      <p:to>
-                                        <p:strVal val="visible"/>
-                                      </p:to>
-                                    </p:set>
-                                  </p:childTnLst>
-                                </p:cTn>
-                              </p:par>
-                            </p:childTnLst>
-                          </p:cTn>
-                        </p:par>
-                      </p:childTnLst>
-                    </p:cTn>
-                  </p:par>
-                  <p:par>
-                    <p:cTn id="9" fill="hold">
-                      <p:stCondLst>
-                        <p:cond delay="indefinite"/>
-                      </p:stCondLst>
-                      <p:childTnLst>
-                        <p:par>
-                          <p:cTn id="10" fill="hold">
-                            <p:stCondLst>
-                              <p:cond delay="0"/>
-                            </p:stCondLst>
-                            <p:childTnLst>
-                              <p:par>
-                                <p:cTn id="11" presetID="1" presetClass="entr" presetSubtype="0" fill="hold" grpId="0" nodeType="clickEffect">
-                                  <p:stCondLst>
-                                    <p:cond delay="0"/>
-                                  </p:stCondLst>
-                                  <p:childTnLst>
-                                    <p:set>
-                                      <p:cBhvr>
-                                        <p:cTn id="12" dur="1" fill="hold">
-                                          <p:stCondLst>
-                                            <p:cond delay="0"/>
-                                          </p:stCondLst>
-                                        </p:cTn>
-                                        <p:tgtEl>
-                                          <p:spTgt spid="3">
-                                            <p:txEl>
-                                              <p:pRg st="2" end="2"/>
+                                              <p:pRg st="8" end="8"/>
                                             </p:txEl>
                                           </p:spTgt>
                                         </p:tgtEl>
@@ -7847,14 +8835,14 @@
                                 </p:cTn>
                               </p:par>
                               <p:par>
-                                <p:cTn id="13" presetID="1" presetClass="entr" presetSubtype="0" fill="hold" grpId="0" nodeType="withEffect">
+                                <p:cTn id="29" presetID="1" presetClass="entr" presetSubtype="0" fill="hold" grpId="0" nodeType="withEffect">
                                   <p:stCondLst>
                                     <p:cond delay="0"/>
                                   </p:stCondLst>
                                   <p:childTnLst>
                                     <p:set>
                                       <p:cBhvr>
-                                        <p:cTn id="14" dur="1" fill="hold">
+                                        <p:cTn id="30" dur="1" fill="hold">
                                           <p:stCondLst>
                                             <p:cond delay="0"/>
                                           </p:stCondLst>
@@ -7862,7 +8850,7 @@
                                         <p:tgtEl>
                                           <p:spTgt spid="3">
                                             <p:txEl>
-                                              <p:pRg st="3" end="3"/>
+                                              <p:pRg st="9" end="9"/>
                                             </p:txEl>
                                           </p:spTgt>
                                         </p:tgtEl>
